--- a/output/proposal_TSUBOMIYA_20260415.pptx
+++ b/output/proposal_TSUBOMIYA_20260415.pptx
@@ -3134,6 +3134,7 @@
           <a:ln>
             <a:noFill/>
           </a:ln>
+          <a:effectLst/>
         </p:spPr>
         <p:style>
           <a:lnRef idx="1">
@@ -3177,6 +3178,7 @@
           <a:ln>
             <a:noFill/>
           </a:ln>
+          <a:effectLst/>
         </p:spPr>
         <p:style>
           <a:lnRef idx="1">
@@ -3220,6 +3222,7 @@
           <a:ln>
             <a:noFill/>
           </a:ln>
+          <a:effectLst/>
         </p:spPr>
         <p:style>
           <a:lnRef idx="1">
@@ -3261,6 +3264,7 @@
           <a:ln>
             <a:noFill/>
           </a:ln>
+          <a:effectLst/>
         </p:spPr>
         <p:style>
           <a:lnRef idx="1">
@@ -3318,6 +3322,7 @@
           <a:ln>
             <a:noFill/>
           </a:ln>
+          <a:effectLst/>
         </p:spPr>
         <p:style>
           <a:lnRef idx="1">
@@ -3375,6 +3380,7 @@
           <a:ln>
             <a:noFill/>
           </a:ln>
+          <a:effectLst/>
         </p:spPr>
         <p:style>
           <a:lnRef idx="1">
@@ -3434,6 +3440,7 @@
           <a:ln>
             <a:noFill/>
           </a:ln>
+          <a:effectLst/>
         </p:spPr>
         <p:style>
           <a:lnRef idx="1">
@@ -3475,6 +3482,7 @@
           <a:ln>
             <a:noFill/>
           </a:ln>
+          <a:effectLst/>
         </p:spPr>
         <p:style>
           <a:lnRef idx="1">
@@ -3532,6 +3540,7 @@
           <a:ln>
             <a:noFill/>
           </a:ln>
+          <a:effectLst/>
         </p:spPr>
         <p:style>
           <a:lnRef idx="1">
@@ -3609,6 +3618,7 @@
           <a:ln>
             <a:noFill/>
           </a:ln>
+          <a:effectLst/>
         </p:spPr>
         <p:style>
           <a:lnRef idx="1">
@@ -3652,6 +3662,7 @@
           <a:ln>
             <a:noFill/>
           </a:ln>
+          <a:effectLst/>
         </p:spPr>
         <p:style>
           <a:lnRef idx="1">
@@ -3693,6 +3704,7 @@
           <a:ln>
             <a:noFill/>
           </a:ln>
+          <a:effectLst/>
         </p:spPr>
         <p:style>
           <a:lnRef idx="1">
@@ -3750,6 +3762,7 @@
           <a:ln>
             <a:noFill/>
           </a:ln>
+          <a:effectLst/>
         </p:spPr>
         <p:style>
           <a:lnRef idx="1">
@@ -3807,6 +3820,7 @@
           <a:ln>
             <a:noFill/>
           </a:ln>
+          <a:effectLst/>
         </p:spPr>
         <p:style>
           <a:lnRef idx="1">
@@ -3866,6 +3880,7 @@
           <a:ln>
             <a:noFill/>
           </a:ln>
+          <a:effectLst/>
         </p:spPr>
         <p:style>
           <a:lnRef idx="1">
@@ -3911,6 +3926,7 @@
           <a:ln>
             <a:noFill/>
           </a:ln>
+          <a:effectLst/>
         </p:spPr>
         <p:style>
           <a:lnRef idx="1">
@@ -3954,6 +3970,7 @@
           <a:ln>
             <a:noFill/>
           </a:ln>
+          <a:effectLst/>
         </p:spPr>
         <p:style>
           <a:lnRef idx="1">
@@ -3995,6 +4012,7 @@
           <a:ln>
             <a:noFill/>
           </a:ln>
+          <a:effectLst/>
         </p:spPr>
         <p:style>
           <a:lnRef idx="1">
@@ -4168,6 +4186,7 @@
           <a:ln>
             <a:noFill/>
           </a:ln>
+          <a:effectLst/>
         </p:spPr>
         <p:style>
           <a:lnRef idx="1">
@@ -4213,6 +4232,7 @@
           <a:ln>
             <a:noFill/>
           </a:ln>
+          <a:effectLst/>
         </p:spPr>
         <p:style>
           <a:lnRef idx="1">
@@ -4256,6 +4276,7 @@
           <a:ln>
             <a:noFill/>
           </a:ln>
+          <a:effectLst/>
         </p:spPr>
         <p:style>
           <a:lnRef idx="1">
@@ -4297,6 +4318,7 @@
           <a:ln>
             <a:noFill/>
           </a:ln>
+          <a:effectLst/>
         </p:spPr>
         <p:style>
           <a:lnRef idx="1">
@@ -4375,6 +4397,7 @@
           <a:ln>
             <a:noFill/>
           </a:ln>
+          <a:effectLst/>
         </p:spPr>
         <p:style>
           <a:lnRef idx="1">
@@ -4420,6 +4443,7 @@
           <a:ln>
             <a:noFill/>
           </a:ln>
+          <a:effectLst/>
         </p:spPr>
         <p:style>
           <a:lnRef idx="1">
@@ -4463,6 +4487,7 @@
           <a:ln>
             <a:noFill/>
           </a:ln>
+          <a:effectLst/>
         </p:spPr>
         <p:style>
           <a:lnRef idx="1">
@@ -4508,6 +4533,7 @@
           <a:ln>
             <a:noFill/>
           </a:ln>
+          <a:effectLst/>
         </p:spPr>
         <p:style>
           <a:lnRef idx="1">
@@ -4565,6 +4591,7 @@
           <a:ln>
             <a:noFill/>
           </a:ln>
+          <a:effectLst/>
         </p:spPr>
         <p:style>
           <a:lnRef idx="1">
@@ -4624,6 +4651,7 @@
           <a:ln>
             <a:noFill/>
           </a:ln>
+          <a:effectLst/>
         </p:spPr>
         <p:style>
           <a:lnRef idx="1">
@@ -4669,6 +4697,7 @@
           <a:ln>
             <a:noFill/>
           </a:ln>
+          <a:effectLst/>
         </p:spPr>
         <p:style>
           <a:lnRef idx="1">
@@ -4712,6 +4741,7 @@
           <a:ln>
             <a:noFill/>
           </a:ln>
+          <a:effectLst/>
         </p:spPr>
         <p:style>
           <a:lnRef idx="1">
@@ -4757,6 +4787,7 @@
           <a:ln>
             <a:noFill/>
           </a:ln>
+          <a:effectLst/>
         </p:spPr>
         <p:style>
           <a:lnRef idx="1">
@@ -4814,6 +4845,7 @@
           <a:ln>
             <a:noFill/>
           </a:ln>
+          <a:effectLst/>
         </p:spPr>
         <p:style>
           <a:lnRef idx="1">
@@ -4873,6 +4905,7 @@
           <a:ln>
             <a:noFill/>
           </a:ln>
+          <a:effectLst/>
         </p:spPr>
         <p:style>
           <a:lnRef idx="1">
@@ -4918,6 +4951,7 @@
           <a:ln>
             <a:noFill/>
           </a:ln>
+          <a:effectLst/>
         </p:spPr>
         <p:style>
           <a:lnRef idx="1">
@@ -4961,6 +4995,7 @@
           <a:ln>
             <a:noFill/>
           </a:ln>
+          <a:effectLst/>
         </p:spPr>
         <p:style>
           <a:lnRef idx="1">
@@ -5006,6 +5041,7 @@
           <a:ln>
             <a:noFill/>
           </a:ln>
+          <a:effectLst/>
         </p:spPr>
         <p:style>
           <a:lnRef idx="1">
@@ -5063,6 +5099,7 @@
           <a:ln>
             <a:noFill/>
           </a:ln>
+          <a:effectLst/>
         </p:spPr>
         <p:style>
           <a:lnRef idx="1">
@@ -5122,6 +5159,7 @@
           <a:ln>
             <a:noFill/>
           </a:ln>
+          <a:effectLst/>
         </p:spPr>
         <p:style>
           <a:lnRef idx="1">
@@ -5167,6 +5205,7 @@
           <a:ln>
             <a:noFill/>
           </a:ln>
+          <a:effectLst/>
         </p:spPr>
         <p:style>
           <a:lnRef idx="1">
@@ -5210,6 +5249,7 @@
           <a:ln>
             <a:noFill/>
           </a:ln>
+          <a:effectLst/>
         </p:spPr>
         <p:style>
           <a:lnRef idx="1">
@@ -5251,6 +5291,7 @@
           <a:ln>
             <a:noFill/>
           </a:ln>
+          <a:effectLst/>
         </p:spPr>
         <p:style>
           <a:lnRef idx="1">
@@ -5329,6 +5370,7 @@
           <a:ln>
             <a:noFill/>
           </a:ln>
+          <a:effectLst/>
         </p:spPr>
         <p:style>
           <a:lnRef idx="1">
@@ -5374,6 +5416,7 @@
           <a:ln>
             <a:noFill/>
           </a:ln>
+          <a:effectLst/>
         </p:spPr>
         <p:style>
           <a:lnRef idx="1">
@@ -5417,6 +5460,7 @@
           <a:ln>
             <a:noFill/>
           </a:ln>
+          <a:effectLst/>
         </p:spPr>
         <p:style>
           <a:lnRef idx="1">
@@ -5462,6 +5506,7 @@
           <a:ln>
             <a:noFill/>
           </a:ln>
+          <a:effectLst/>
         </p:spPr>
         <p:style>
           <a:lnRef idx="1">
@@ -5519,6 +5564,7 @@
           <a:ln>
             <a:noFill/>
           </a:ln>
+          <a:effectLst/>
         </p:spPr>
         <p:style>
           <a:lnRef idx="1">
@@ -5578,6 +5624,7 @@
           <a:ln>
             <a:noFill/>
           </a:ln>
+          <a:effectLst/>
         </p:spPr>
         <p:style>
           <a:lnRef idx="1">
@@ -5623,6 +5670,7 @@
           <a:ln>
             <a:noFill/>
           </a:ln>
+          <a:effectLst/>
         </p:spPr>
         <p:style>
           <a:lnRef idx="1">
@@ -5666,6 +5714,7 @@
           <a:ln>
             <a:noFill/>
           </a:ln>
+          <a:effectLst/>
         </p:spPr>
         <p:style>
           <a:lnRef idx="1">
@@ -5711,6 +5760,7 @@
           <a:ln>
             <a:noFill/>
           </a:ln>
+          <a:effectLst/>
         </p:spPr>
         <p:style>
           <a:lnRef idx="1">
@@ -5768,6 +5818,7 @@
           <a:ln>
             <a:noFill/>
           </a:ln>
+          <a:effectLst/>
         </p:spPr>
         <p:style>
           <a:lnRef idx="1">
@@ -5802,7 +5853,7 @@
                 </a:solidFill>
                 <a:latin typeface="Noto Sans JP"/>
               </a:rPr>
-              <a:t>Claude CodeでLP制作は80%止まり</a:t>
+              <a:t>アンチグレイビティ×Claude CodeでLP制作は80%止まり</a:t>
             </a:r>
           </a:p>
         </p:txBody>
@@ -5827,6 +5878,7 @@
           <a:ln>
             <a:noFill/>
           </a:ln>
+          <a:effectLst/>
         </p:spPr>
         <p:style>
           <a:lnRef idx="1">
@@ -5872,6 +5924,7 @@
           <a:ln>
             <a:noFill/>
           </a:ln>
+          <a:effectLst/>
         </p:spPr>
         <p:style>
           <a:lnRef idx="1">
@@ -5915,6 +5968,7 @@
           <a:ln>
             <a:noFill/>
           </a:ln>
+          <a:effectLst/>
         </p:spPr>
         <p:style>
           <a:lnRef idx="1">
@@ -5960,6 +6014,7 @@
           <a:ln>
             <a:noFill/>
           </a:ln>
+          <a:effectLst/>
         </p:spPr>
         <p:style>
           <a:lnRef idx="1">
@@ -6017,6 +6072,7 @@
           <a:ln>
             <a:noFill/>
           </a:ln>
+          <a:effectLst/>
         </p:spPr>
         <p:style>
           <a:lnRef idx="1">
@@ -6076,6 +6132,7 @@
           <a:ln>
             <a:noFill/>
           </a:ln>
+          <a:effectLst/>
         </p:spPr>
         <p:style>
           <a:lnRef idx="1">
@@ -6121,6 +6178,7 @@
           <a:ln>
             <a:noFill/>
           </a:ln>
+          <a:effectLst/>
         </p:spPr>
         <p:style>
           <a:lnRef idx="1">
@@ -6164,6 +6222,7 @@
           <a:ln>
             <a:noFill/>
           </a:ln>
+          <a:effectLst/>
         </p:spPr>
         <p:style>
           <a:lnRef idx="1">
@@ -6205,6 +6264,7 @@
           <a:ln>
             <a:noFill/>
           </a:ln>
+          <a:effectLst/>
         </p:spPr>
         <p:style>
           <a:lnRef idx="1">
@@ -6283,6 +6343,7 @@
           <a:ln>
             <a:noFill/>
           </a:ln>
+          <a:effectLst/>
         </p:spPr>
         <p:style>
           <a:lnRef idx="1">
@@ -6328,6 +6389,7 @@
           <a:ln>
             <a:noFill/>
           </a:ln>
+          <a:effectLst/>
         </p:spPr>
         <p:style>
           <a:lnRef idx="1">
@@ -6371,6 +6433,7 @@
           <a:ln>
             <a:noFill/>
           </a:ln>
+          <a:effectLst/>
         </p:spPr>
         <p:style>
           <a:lnRef idx="1">
@@ -6416,6 +6479,7 @@
           <a:ln>
             <a:noFill/>
           </a:ln>
+          <a:effectLst/>
         </p:spPr>
         <p:style>
           <a:lnRef idx="1">
@@ -6473,6 +6537,7 @@
           <a:ln>
             <a:noFill/>
           </a:ln>
+          <a:effectLst/>
         </p:spPr>
         <p:style>
           <a:lnRef idx="1">
@@ -6532,6 +6597,7 @@
           <a:ln>
             <a:noFill/>
           </a:ln>
+          <a:effectLst/>
         </p:spPr>
         <p:style>
           <a:lnRef idx="1">
@@ -6577,6 +6643,7 @@
           <a:ln>
             <a:noFill/>
           </a:ln>
+          <a:effectLst/>
         </p:spPr>
         <p:style>
           <a:lnRef idx="1">
@@ -6620,6 +6687,7 @@
           <a:ln>
             <a:noFill/>
           </a:ln>
+          <a:effectLst/>
         </p:spPr>
         <p:style>
           <a:lnRef idx="1">
@@ -6665,6 +6733,7 @@
           <a:ln>
             <a:noFill/>
           </a:ln>
+          <a:effectLst/>
         </p:spPr>
         <p:style>
           <a:lnRef idx="1">
@@ -6722,6 +6791,7 @@
           <a:ln>
             <a:noFill/>
           </a:ln>
+          <a:effectLst/>
         </p:spPr>
         <p:style>
           <a:lnRef idx="1">
@@ -6781,6 +6851,7 @@
           <a:ln>
             <a:noFill/>
           </a:ln>
+          <a:effectLst/>
         </p:spPr>
         <p:style>
           <a:lnRef idx="1">
@@ -6826,6 +6897,7 @@
           <a:ln>
             <a:noFill/>
           </a:ln>
+          <a:effectLst/>
         </p:spPr>
         <p:style>
           <a:lnRef idx="1">
@@ -6869,6 +6941,7 @@
           <a:ln>
             <a:noFill/>
           </a:ln>
+          <a:effectLst/>
         </p:spPr>
         <p:style>
           <a:lnRef idx="1">
@@ -6914,6 +6987,7 @@
           <a:ln>
             <a:noFill/>
           </a:ln>
+          <a:effectLst/>
         </p:spPr>
         <p:style>
           <a:lnRef idx="1">
@@ -6971,6 +7045,7 @@
           <a:ln>
             <a:noFill/>
           </a:ln>
+          <a:effectLst/>
         </p:spPr>
         <p:style>
           <a:lnRef idx="1">
@@ -7030,6 +7105,7 @@
           <a:ln>
             <a:noFill/>
           </a:ln>
+          <a:effectLst/>
         </p:spPr>
         <p:style>
           <a:lnRef idx="1">
@@ -7075,6 +7151,7 @@
           <a:ln>
             <a:noFill/>
           </a:ln>
+          <a:effectLst/>
         </p:spPr>
         <p:style>
           <a:lnRef idx="1">
@@ -7118,6 +7195,7 @@
           <a:ln>
             <a:noFill/>
           </a:ln>
+          <a:effectLst/>
         </p:spPr>
         <p:style>
           <a:lnRef idx="1">
@@ -7159,6 +7237,7 @@
           <a:ln>
             <a:noFill/>
           </a:ln>
+          <a:effectLst/>
         </p:spPr>
         <p:style>
           <a:lnRef idx="1">
@@ -7237,6 +7316,7 @@
           <a:ln>
             <a:noFill/>
           </a:ln>
+          <a:effectLst/>
         </p:spPr>
         <p:style>
           <a:lnRef idx="1">
@@ -7282,6 +7362,7 @@
           <a:ln>
             <a:noFill/>
           </a:ln>
+          <a:effectLst/>
         </p:spPr>
         <p:style>
           <a:lnRef idx="1">
@@ -7325,6 +7406,7 @@
           <a:ln>
             <a:noFill/>
           </a:ln>
+          <a:effectLst/>
         </p:spPr>
         <p:style>
           <a:lnRef idx="1">
@@ -7370,6 +7452,7 @@
           <a:ln>
             <a:noFill/>
           </a:ln>
+          <a:effectLst/>
         </p:spPr>
         <p:style>
           <a:lnRef idx="1">
@@ -7427,6 +7510,7 @@
           <a:ln>
             <a:noFill/>
           </a:ln>
+          <a:effectLst/>
         </p:spPr>
         <p:style>
           <a:lnRef idx="1">
@@ -7486,6 +7570,7 @@
           <a:ln>
             <a:noFill/>
           </a:ln>
+          <a:effectLst/>
         </p:spPr>
         <p:style>
           <a:lnRef idx="1">
@@ -7531,6 +7616,7 @@
           <a:ln>
             <a:noFill/>
           </a:ln>
+          <a:effectLst/>
         </p:spPr>
         <p:style>
           <a:lnRef idx="1">
@@ -7574,6 +7660,7 @@
           <a:ln>
             <a:noFill/>
           </a:ln>
+          <a:effectLst/>
         </p:spPr>
         <p:style>
           <a:lnRef idx="1">
@@ -7619,6 +7706,7 @@
           <a:ln>
             <a:noFill/>
           </a:ln>
+          <a:effectLst/>
         </p:spPr>
         <p:style>
           <a:lnRef idx="1">
@@ -7676,6 +7764,7 @@
           <a:ln>
             <a:noFill/>
           </a:ln>
+          <a:effectLst/>
         </p:spPr>
         <p:style>
           <a:lnRef idx="1">
@@ -7735,6 +7824,7 @@
           <a:ln>
             <a:noFill/>
           </a:ln>
+          <a:effectLst/>
         </p:spPr>
         <p:style>
           <a:lnRef idx="1">
@@ -7780,6 +7870,7 @@
           <a:ln>
             <a:noFill/>
           </a:ln>
+          <a:effectLst/>
         </p:spPr>
         <p:style>
           <a:lnRef idx="1">
@@ -7823,6 +7914,7 @@
           <a:ln>
             <a:noFill/>
           </a:ln>
+          <a:effectLst/>
         </p:spPr>
         <p:style>
           <a:lnRef idx="1">
@@ -7868,6 +7960,7 @@
           <a:ln>
             <a:noFill/>
           </a:ln>
+          <a:effectLst/>
         </p:spPr>
         <p:style>
           <a:lnRef idx="1">
@@ -7925,6 +8018,7 @@
           <a:ln>
             <a:noFill/>
           </a:ln>
+          <a:effectLst/>
         </p:spPr>
         <p:style>
           <a:lnRef idx="1">
@@ -8002,6 +8096,7 @@
           <a:ln>
             <a:noFill/>
           </a:ln>
+          <a:effectLst/>
         </p:spPr>
         <p:style>
           <a:lnRef idx="1">
@@ -8045,6 +8140,7 @@
           <a:ln>
             <a:noFill/>
           </a:ln>
+          <a:effectLst/>
         </p:spPr>
         <p:style>
           <a:lnRef idx="1">
@@ -8086,6 +8182,7 @@
           <a:ln>
             <a:noFill/>
           </a:ln>
+          <a:effectLst/>
         </p:spPr>
         <p:style>
           <a:lnRef idx="1">
@@ -8143,6 +8240,7 @@
           <a:ln>
             <a:noFill/>
           </a:ln>
+          <a:effectLst/>
         </p:spPr>
         <p:style>
           <a:lnRef idx="1">
@@ -8200,6 +8298,7 @@
           <a:ln>
             <a:noFill/>
           </a:ln>
+          <a:effectLst/>
         </p:spPr>
         <p:style>
           <a:lnRef idx="1">
@@ -8259,6 +8358,7 @@
           <a:ln>
             <a:noFill/>
           </a:ln>
+          <a:effectLst/>
         </p:spPr>
         <p:style>
           <a:lnRef idx="1">
@@ -8302,6 +8402,7 @@
           <a:ln>
             <a:noFill/>
           </a:ln>
+          <a:effectLst/>
         </p:spPr>
         <p:style>
           <a:lnRef idx="1">
@@ -8356,6 +8457,7 @@
           <a:ln>
             <a:noFill/>
           </a:ln>
+          <a:effectLst/>
         </p:spPr>
         <p:style>
           <a:lnRef idx="1">
@@ -8397,6 +8499,7 @@
           <a:ln>
             <a:noFill/>
           </a:ln>
+          <a:effectLst/>
         </p:spPr>
         <p:style>
           <a:lnRef idx="1">
@@ -8454,6 +8557,7 @@
           <a:ln>
             <a:noFill/>
           </a:ln>
+          <a:effectLst/>
         </p:spPr>
         <p:style>
           <a:lnRef idx="1">
@@ -8511,6 +8615,7 @@
           <a:ln>
             <a:noFill/>
           </a:ln>
+          <a:effectLst/>
         </p:spPr>
         <p:style>
           <a:lnRef idx="1">
@@ -8572,6 +8677,7 @@
           <a:ln>
             <a:noFill/>
           </a:ln>
+          <a:effectLst/>
         </p:spPr>
         <p:style>
           <a:lnRef idx="1">
@@ -8613,6 +8719,7 @@
           <a:ln>
             <a:noFill/>
           </a:ln>
+          <a:effectLst/>
         </p:spPr>
         <p:style>
           <a:lnRef idx="1">
@@ -8670,6 +8777,7 @@
           <a:ln>
             <a:noFill/>
           </a:ln>
+          <a:effectLst/>
         </p:spPr>
         <p:style>
           <a:lnRef idx="1">
@@ -8727,6 +8835,7 @@
           <a:ln>
             <a:noFill/>
           </a:ln>
+          <a:effectLst/>
         </p:spPr>
         <p:style>
           <a:lnRef idx="1">
@@ -8788,6 +8897,7 @@
           <a:ln>
             <a:noFill/>
           </a:ln>
+          <a:effectLst/>
         </p:spPr>
         <p:style>
           <a:lnRef idx="1">
@@ -8829,6 +8939,7 @@
           <a:ln>
             <a:noFill/>
           </a:ln>
+          <a:effectLst/>
         </p:spPr>
         <p:style>
           <a:lnRef idx="1">
@@ -8886,6 +8997,7 @@
           <a:ln>
             <a:noFill/>
           </a:ln>
+          <a:effectLst/>
         </p:spPr>
         <p:style>
           <a:lnRef idx="1">
@@ -8943,6 +9055,7 @@
           <a:ln>
             <a:noFill/>
           </a:ln>
+          <a:effectLst/>
         </p:spPr>
         <p:style>
           <a:lnRef idx="1">
@@ -9004,6 +9117,7 @@
           <a:ln>
             <a:noFill/>
           </a:ln>
+          <a:effectLst/>
         </p:spPr>
         <p:style>
           <a:lnRef idx="1">
@@ -9045,6 +9159,7 @@
           <a:ln>
             <a:noFill/>
           </a:ln>
+          <a:effectLst/>
         </p:spPr>
         <p:style>
           <a:lnRef idx="1">
@@ -9102,6 +9217,7 @@
           <a:ln>
             <a:noFill/>
           </a:ln>
+          <a:effectLst/>
         </p:spPr>
         <p:style>
           <a:lnRef idx="1">
@@ -9159,6 +9275,7 @@
           <a:ln>
             <a:noFill/>
           </a:ln>
+          <a:effectLst/>
         </p:spPr>
         <p:style>
           <a:lnRef idx="1">
@@ -9220,6 +9337,7 @@
           <a:ln>
             <a:noFill/>
           </a:ln>
+          <a:effectLst/>
         </p:spPr>
         <p:style>
           <a:lnRef idx="1">
@@ -9298,6 +9416,7 @@
           <a:ln>
             <a:noFill/>
           </a:ln>
+          <a:effectLst/>
         </p:spPr>
         <p:style>
           <a:lnRef idx="1">
@@ -9343,6 +9462,7 @@
           <a:ln>
             <a:noFill/>
           </a:ln>
+          <a:effectLst/>
         </p:spPr>
         <p:style>
           <a:lnRef idx="1">
@@ -9402,6 +9522,7 @@
           <a:ln>
             <a:noFill/>
           </a:ln>
+          <a:effectLst/>
         </p:spPr>
         <p:style>
           <a:lnRef idx="1">
@@ -9463,6 +9584,7 @@
           <a:ln>
             <a:noFill/>
           </a:ln>
+          <a:effectLst/>
         </p:spPr>
         <p:style>
           <a:lnRef idx="1">
@@ -9506,6 +9628,7 @@
           <a:ln>
             <a:noFill/>
           </a:ln>
+          <a:effectLst/>
         </p:spPr>
         <p:style>
           <a:lnRef idx="1">
@@ -9547,6 +9670,7 @@
           <a:ln>
             <a:noFill/>
           </a:ln>
+          <a:effectLst/>
         </p:spPr>
         <p:style>
           <a:lnRef idx="1">
@@ -9604,6 +9728,7 @@
           <a:ln>
             <a:noFill/>
           </a:ln>
+          <a:effectLst/>
         </p:spPr>
         <p:style>
           <a:lnRef idx="1">
@@ -9661,6 +9786,7 @@
           <a:ln>
             <a:noFill/>
           </a:ln>
+          <a:effectLst/>
         </p:spPr>
         <p:style>
           <a:lnRef idx="1">
@@ -9720,6 +9846,7 @@
           <a:ln>
             <a:noFill/>
           </a:ln>
+          <a:effectLst/>
         </p:spPr>
         <p:style>
           <a:lnRef idx="1">
@@ -9765,6 +9892,7 @@
           <a:ln>
             <a:noFill/>
           </a:ln>
+          <a:effectLst/>
         </p:spPr>
         <p:style>
           <a:lnRef idx="1">
@@ -9808,6 +9936,7 @@
           <a:ln>
             <a:noFill/>
           </a:ln>
+          <a:effectLst/>
         </p:spPr>
         <p:style>
           <a:lnRef idx="1">
@@ -9849,6 +9978,7 @@
           <a:ln>
             <a:noFill/>
           </a:ln>
+          <a:effectLst/>
         </p:spPr>
         <p:style>
           <a:lnRef idx="1">
@@ -9910,6 +10040,7 @@
           <a:ln>
             <a:noFill/>
           </a:ln>
+          <a:effectLst/>
         </p:spPr>
         <p:style>
           <a:lnRef idx="1">
@@ -9971,6 +10102,7 @@
           <a:ln>
             <a:noFill/>
           </a:ln>
+          <a:effectLst/>
         </p:spPr>
         <p:style>
           <a:lnRef idx="1">
@@ -10030,6 +10162,7 @@
           <a:ln>
             <a:noFill/>
           </a:ln>
+          <a:effectLst/>
         </p:spPr>
         <p:style>
           <a:lnRef idx="1">
@@ -10071,6 +10204,7 @@
           <a:ln>
             <a:noFill/>
           </a:ln>
+          <a:effectLst/>
         </p:spPr>
         <p:style>
           <a:lnRef idx="1">
@@ -10132,6 +10266,7 @@
           <a:ln>
             <a:noFill/>
           </a:ln>
+          <a:effectLst/>
         </p:spPr>
         <p:style>
           <a:lnRef idx="1">
@@ -10193,6 +10328,7 @@
           <a:ln>
             <a:noFill/>
           </a:ln>
+          <a:effectLst/>
         </p:spPr>
         <p:style>
           <a:lnRef idx="1">
@@ -10271,6 +10407,7 @@
           <a:ln>
             <a:noFill/>
           </a:ln>
+          <a:effectLst/>
         </p:spPr>
         <p:style>
           <a:lnRef idx="1">
@@ -10316,6 +10453,7 @@
           <a:ln>
             <a:noFill/>
           </a:ln>
+          <a:effectLst/>
         </p:spPr>
         <p:style>
           <a:lnRef idx="1">
@@ -10359,6 +10497,7 @@
           <a:ln>
             <a:noFill/>
           </a:ln>
+          <a:effectLst/>
         </p:spPr>
         <p:style>
           <a:lnRef idx="1">
@@ -10400,6 +10539,7 @@
           <a:ln>
             <a:noFill/>
           </a:ln>
+          <a:effectLst/>
         </p:spPr>
         <p:style>
           <a:lnRef idx="1">
@@ -10461,6 +10601,7 @@
           <a:ln>
             <a:noFill/>
           </a:ln>
+          <a:effectLst/>
         </p:spPr>
         <p:style>
           <a:lnRef idx="1">
@@ -10522,6 +10663,7 @@
           <a:ln>
             <a:noFill/>
           </a:ln>
+          <a:effectLst/>
         </p:spPr>
         <p:style>
           <a:lnRef idx="1">
@@ -10581,6 +10723,7 @@
           <a:ln>
             <a:noFill/>
           </a:ln>
+          <a:effectLst/>
         </p:spPr>
         <p:style>
           <a:lnRef idx="1">
@@ -10622,6 +10765,7 @@
           <a:ln>
             <a:noFill/>
           </a:ln>
+          <a:effectLst/>
         </p:spPr>
         <p:style>
           <a:lnRef idx="1">
@@ -10683,6 +10827,7 @@
           <a:ln>
             <a:noFill/>
           </a:ln>
+          <a:effectLst/>
         </p:spPr>
         <p:style>
           <a:lnRef idx="1">
@@ -10744,6 +10889,7 @@
           <a:ln>
             <a:noFill/>
           </a:ln>
+          <a:effectLst/>
         </p:spPr>
         <p:style>
           <a:lnRef idx="1">
@@ -10822,6 +10968,7 @@
           <a:ln>
             <a:noFill/>
           </a:ln>
+          <a:effectLst/>
         </p:spPr>
         <p:style>
           <a:lnRef idx="1">
@@ -10867,6 +11014,7 @@
           <a:ln>
             <a:noFill/>
           </a:ln>
+          <a:effectLst/>
         </p:spPr>
         <p:style>
           <a:lnRef idx="1">
@@ -10910,6 +11058,7 @@
           <a:ln>
             <a:noFill/>
           </a:ln>
+          <a:effectLst/>
         </p:spPr>
         <p:style>
           <a:lnRef idx="1">
@@ -10951,6 +11100,7 @@
           <a:ln>
             <a:noFill/>
           </a:ln>
+          <a:effectLst/>
         </p:spPr>
         <p:style>
           <a:lnRef idx="1">
@@ -11012,6 +11162,7 @@
           <a:ln>
             <a:noFill/>
           </a:ln>
+          <a:effectLst/>
         </p:spPr>
         <p:style>
           <a:lnRef idx="1">
@@ -11073,6 +11224,7 @@
           <a:ln>
             <a:noFill/>
           </a:ln>
+          <a:effectLst/>
         </p:spPr>
         <p:style>
           <a:lnRef idx="1">
@@ -11132,6 +11284,7 @@
           <a:ln>
             <a:noFill/>
           </a:ln>
+          <a:effectLst/>
         </p:spPr>
         <p:style>
           <a:lnRef idx="1">
@@ -11173,6 +11326,7 @@
           <a:ln>
             <a:noFill/>
           </a:ln>
+          <a:effectLst/>
         </p:spPr>
         <p:style>
           <a:lnRef idx="1">
@@ -11234,6 +11388,7 @@
           <a:ln>
             <a:noFill/>
           </a:ln>
+          <a:effectLst/>
         </p:spPr>
         <p:style>
           <a:lnRef idx="1">
@@ -11295,6 +11450,7 @@
           <a:ln>
             <a:noFill/>
           </a:ln>
+          <a:effectLst/>
         </p:spPr>
         <p:style>
           <a:lnRef idx="1">
@@ -11373,6 +11529,7 @@
           <a:ln>
             <a:noFill/>
           </a:ln>
+          <a:effectLst/>
         </p:spPr>
         <p:style>
           <a:lnRef idx="1">
@@ -11418,6 +11575,7 @@
           <a:ln>
             <a:noFill/>
           </a:ln>
+          <a:effectLst/>
         </p:spPr>
         <p:style>
           <a:lnRef idx="1">
@@ -11477,6 +11635,7 @@
           <a:ln>
             <a:noFill/>
           </a:ln>
+          <a:effectLst/>
         </p:spPr>
         <p:style>
           <a:lnRef idx="1">
@@ -11538,6 +11697,7 @@
           <a:ln>
             <a:noFill/>
           </a:ln>
+          <a:effectLst/>
         </p:spPr>
         <p:style>
           <a:lnRef idx="1">
@@ -11581,6 +11741,7 @@
           <a:ln>
             <a:noFill/>
           </a:ln>
+          <a:effectLst/>
         </p:spPr>
         <p:style>
           <a:lnRef idx="1">
@@ -11622,6 +11783,7 @@
           <a:ln>
             <a:noFill/>
           </a:ln>
+          <a:effectLst/>
         </p:spPr>
         <p:style>
           <a:lnRef idx="1">
@@ -11679,6 +11841,7 @@
           <a:ln>
             <a:noFill/>
           </a:ln>
+          <a:effectLst/>
         </p:spPr>
         <p:style>
           <a:lnRef idx="1">
@@ -11736,6 +11899,7 @@
           <a:ln>
             <a:noFill/>
           </a:ln>
+          <a:effectLst/>
         </p:spPr>
         <p:style>
           <a:lnRef idx="1">
@@ -11795,6 +11959,7 @@
           <a:ln>
             <a:noFill/>
           </a:ln>
+          <a:effectLst/>
         </p:spPr>
         <p:style>
           <a:lnRef idx="1">
@@ -11856,6 +12021,7 @@
           <a:ln>
             <a:noFill/>
           </a:ln>
+          <a:effectLst/>
         </p:spPr>
         <p:style>
           <a:lnRef idx="1">
@@ -11899,6 +12065,7 @@
           <a:ln>
             <a:noFill/>
           </a:ln>
+          <a:effectLst/>
         </p:spPr>
         <p:style>
           <a:lnRef idx="1">
@@ -11940,6 +12107,7 @@
           <a:ln>
             <a:noFill/>
           </a:ln>
+          <a:effectLst/>
         </p:spPr>
         <p:style>
           <a:lnRef idx="1">
@@ -11997,6 +12165,7 @@
           <a:ln>
             <a:noFill/>
           </a:ln>
+          <a:effectLst/>
         </p:spPr>
         <p:style>
           <a:lnRef idx="1">
@@ -12054,6 +12223,7 @@
           <a:ln>
             <a:noFill/>
           </a:ln>
+          <a:effectLst/>
         </p:spPr>
         <p:style>
           <a:lnRef idx="1">
@@ -12113,6 +12283,7 @@
           <a:ln>
             <a:noFill/>
           </a:ln>
+          <a:effectLst/>
         </p:spPr>
         <p:style>
           <a:lnRef idx="1">
@@ -12158,6 +12329,7 @@
           <a:ln>
             <a:noFill/>
           </a:ln>
+          <a:effectLst/>
         </p:spPr>
         <p:style>
           <a:lnRef idx="1">
@@ -12201,6 +12373,7 @@
           <a:ln>
             <a:noFill/>
           </a:ln>
+          <a:effectLst/>
         </p:spPr>
         <p:style>
           <a:lnRef idx="1">
@@ -12246,6 +12419,7 @@
           <a:ln>
             <a:noFill/>
           </a:ln>
+          <a:effectLst/>
         </p:spPr>
         <p:style>
           <a:lnRef idx="1">
@@ -12307,6 +12481,7 @@
           <a:ln>
             <a:noFill/>
           </a:ln>
+          <a:effectLst/>
         </p:spPr>
         <p:style>
           <a:lnRef idx="1">
@@ -12364,6 +12539,7 @@
           <a:ln>
             <a:noFill/>
           </a:ln>
+          <a:effectLst/>
         </p:spPr>
         <p:style>
           <a:lnRef idx="1">
@@ -12425,6 +12601,7 @@
           <a:ln>
             <a:noFill/>
           </a:ln>
+          <a:effectLst/>
         </p:spPr>
         <p:style>
           <a:lnRef idx="1">
@@ -12482,6 +12659,7 @@
           <a:ln>
             <a:noFill/>
           </a:ln>
+          <a:effectLst/>
         </p:spPr>
         <p:style>
           <a:lnRef idx="1">
@@ -12543,6 +12721,7 @@
           <a:ln>
             <a:noFill/>
           </a:ln>
+          <a:effectLst/>
         </p:spPr>
         <p:style>
           <a:lnRef idx="1">
@@ -12600,6 +12779,7 @@
           <a:ln>
             <a:noFill/>
           </a:ln>
+          <a:effectLst/>
         </p:spPr>
         <p:style>
           <a:lnRef idx="1">
@@ -12661,6 +12841,7 @@
           <a:ln>
             <a:noFill/>
           </a:ln>
+          <a:effectLst/>
         </p:spPr>
         <p:style>
           <a:lnRef idx="1">
@@ -12718,6 +12899,7 @@
           <a:ln>
             <a:noFill/>
           </a:ln>
+          <a:effectLst/>
         </p:spPr>
         <p:style>
           <a:lnRef idx="1">
@@ -12775,6 +12957,7 @@
           <a:ln>
             <a:noFill/>
           </a:ln>
+          <a:effectLst/>
         </p:spPr>
         <p:style>
           <a:lnRef idx="1">
@@ -12836,6 +13019,7 @@
           <a:ln>
             <a:noFill/>
           </a:ln>
+          <a:effectLst/>
         </p:spPr>
         <p:style>
           <a:lnRef idx="1">
@@ -12879,6 +13063,7 @@
           <a:ln>
             <a:noFill/>
           </a:ln>
+          <a:effectLst/>
         </p:spPr>
         <p:style>
           <a:lnRef idx="1">
@@ -12924,6 +13109,7 @@
           <a:ln>
             <a:noFill/>
           </a:ln>
+          <a:effectLst/>
         </p:spPr>
         <p:style>
           <a:lnRef idx="1">
@@ -12985,6 +13171,7 @@
           <a:ln>
             <a:noFill/>
           </a:ln>
+          <a:effectLst/>
         </p:spPr>
         <p:style>
           <a:lnRef idx="1">
@@ -13042,6 +13229,7 @@
           <a:ln>
             <a:noFill/>
           </a:ln>
+          <a:effectLst/>
         </p:spPr>
         <p:style>
           <a:lnRef idx="1">
@@ -13076,7 +13264,7 @@
                 </a:solidFill>
                 <a:latin typeface="Noto Sans JP"/>
               </a:rPr>
-              <a:t>Claude Codeで自作、数時間で公開</a:t>
+              <a:t>アンチグレイビティ等で自作、数時間で公開</a:t>
             </a:r>
           </a:p>
         </p:txBody>
@@ -13103,6 +13291,7 @@
           <a:ln>
             <a:noFill/>
           </a:ln>
+          <a:effectLst/>
         </p:spPr>
         <p:style>
           <a:lnRef idx="1">
@@ -13160,6 +13349,7 @@
           <a:ln>
             <a:noFill/>
           </a:ln>
+          <a:effectLst/>
         </p:spPr>
         <p:style>
           <a:lnRef idx="1">
@@ -13221,6 +13411,7 @@
           <a:ln>
             <a:noFill/>
           </a:ln>
+          <a:effectLst/>
         </p:spPr>
         <p:style>
           <a:lnRef idx="1">
@@ -13278,6 +13469,7 @@
           <a:ln>
             <a:noFill/>
           </a:ln>
+          <a:effectLst/>
         </p:spPr>
         <p:style>
           <a:lnRef idx="1">
@@ -13339,6 +13531,7 @@
           <a:ln>
             <a:noFill/>
           </a:ln>
+          <a:effectLst/>
         </p:spPr>
         <p:style>
           <a:lnRef idx="1">
@@ -13396,6 +13589,7 @@
           <a:ln>
             <a:noFill/>
           </a:ln>
+          <a:effectLst/>
         </p:spPr>
         <p:style>
           <a:lnRef idx="1">
@@ -13473,6 +13667,7 @@
           <a:ln>
             <a:noFill/>
           </a:ln>
+          <a:effectLst/>
         </p:spPr>
         <p:style>
           <a:lnRef idx="1">
@@ -13516,6 +13711,7 @@
           <a:ln>
             <a:noFill/>
           </a:ln>
+          <a:effectLst/>
         </p:spPr>
         <p:style>
           <a:lnRef idx="1">
@@ -13557,6 +13753,7 @@
           <a:ln>
             <a:noFill/>
           </a:ln>
+          <a:effectLst/>
         </p:spPr>
         <p:style>
           <a:lnRef idx="1">
@@ -13614,6 +13811,7 @@
           <a:ln>
             <a:noFill/>
           </a:ln>
+          <a:effectLst/>
         </p:spPr>
         <p:style>
           <a:lnRef idx="1">
@@ -13671,6 +13869,7 @@
           <a:ln>
             <a:noFill/>
           </a:ln>
+          <a:effectLst/>
         </p:spPr>
         <p:style>
           <a:lnRef idx="1">
@@ -13730,6 +13929,7 @@
           <a:ln>
             <a:noFill/>
           </a:ln>
+          <a:effectLst/>
         </p:spPr>
         <p:style>
           <a:lnRef idx="1">
@@ -13775,6 +13975,7 @@
           <a:ln>
             <a:noFill/>
           </a:ln>
+          <a:effectLst/>
         </p:spPr>
         <p:style>
           <a:lnRef idx="1">
@@ -13818,6 +14019,7 @@
           <a:ln>
             <a:noFill/>
           </a:ln>
+          <a:effectLst/>
         </p:spPr>
         <p:style>
           <a:lnRef idx="1">
@@ -13863,6 +14065,7 @@
           <a:ln>
             <a:noFill/>
           </a:ln>
+          <a:effectLst/>
         </p:spPr>
         <p:style>
           <a:lnRef idx="1">
@@ -13924,6 +14127,7 @@
           <a:ln>
             <a:noFill/>
           </a:ln>
+          <a:effectLst/>
         </p:spPr>
         <p:style>
           <a:lnRef idx="1">
@@ -13981,6 +14185,7 @@
           <a:ln>
             <a:noFill/>
           </a:ln>
+          <a:effectLst/>
         </p:spPr>
         <p:style>
           <a:lnRef idx="1">
@@ -14042,6 +14247,7 @@
           <a:ln>
             <a:noFill/>
           </a:ln>
+          <a:effectLst/>
         </p:spPr>
         <p:style>
           <a:lnRef idx="1">
@@ -14099,6 +14305,7 @@
           <a:ln>
             <a:noFill/>
           </a:ln>
+          <a:effectLst/>
         </p:spPr>
         <p:style>
           <a:lnRef idx="1">
@@ -14160,6 +14367,7 @@
           <a:ln>
             <a:noFill/>
           </a:ln>
+          <a:effectLst/>
         </p:spPr>
         <p:style>
           <a:lnRef idx="1">
@@ -14217,6 +14425,7 @@
           <a:ln>
             <a:noFill/>
           </a:ln>
+          <a:effectLst/>
         </p:spPr>
         <p:style>
           <a:lnRef idx="1">
@@ -14278,6 +14487,7 @@
           <a:ln>
             <a:noFill/>
           </a:ln>
+          <a:effectLst/>
         </p:spPr>
         <p:style>
           <a:lnRef idx="1">
@@ -14335,6 +14545,7 @@
           <a:ln>
             <a:noFill/>
           </a:ln>
+          <a:effectLst/>
         </p:spPr>
         <p:style>
           <a:lnRef idx="1">
@@ -14392,6 +14603,7 @@
           <a:ln>
             <a:noFill/>
           </a:ln>
+          <a:effectLst/>
         </p:spPr>
         <p:style>
           <a:lnRef idx="1">
@@ -14453,6 +14665,7 @@
           <a:ln>
             <a:noFill/>
           </a:ln>
+          <a:effectLst/>
         </p:spPr>
         <p:style>
           <a:lnRef idx="1">
@@ -14496,6 +14709,7 @@
           <a:ln>
             <a:noFill/>
           </a:ln>
+          <a:effectLst/>
         </p:spPr>
         <p:style>
           <a:lnRef idx="1">
@@ -14541,6 +14755,7 @@
           <a:ln>
             <a:noFill/>
           </a:ln>
+          <a:effectLst/>
         </p:spPr>
         <p:style>
           <a:lnRef idx="1">
@@ -14602,6 +14817,7 @@
           <a:ln>
             <a:noFill/>
           </a:ln>
+          <a:effectLst/>
         </p:spPr>
         <p:style>
           <a:lnRef idx="1">
@@ -14659,6 +14875,7 @@
           <a:ln>
             <a:noFill/>
           </a:ln>
+          <a:effectLst/>
         </p:spPr>
         <p:style>
           <a:lnRef idx="1">
@@ -14720,6 +14937,7 @@
           <a:ln>
             <a:noFill/>
           </a:ln>
+          <a:effectLst/>
         </p:spPr>
         <p:style>
           <a:lnRef idx="1">
@@ -14777,6 +14995,7 @@
           <a:ln>
             <a:noFill/>
           </a:ln>
+          <a:effectLst/>
         </p:spPr>
         <p:style>
           <a:lnRef idx="1">
@@ -14838,6 +15057,7 @@
           <a:ln>
             <a:noFill/>
           </a:ln>
+          <a:effectLst/>
         </p:spPr>
         <p:style>
           <a:lnRef idx="1">
@@ -14895,6 +15115,7 @@
           <a:ln>
             <a:noFill/>
           </a:ln>
+          <a:effectLst/>
         </p:spPr>
         <p:style>
           <a:lnRef idx="1">
@@ -14956,6 +15177,7 @@
           <a:ln>
             <a:noFill/>
           </a:ln>
+          <a:effectLst/>
         </p:spPr>
         <p:style>
           <a:lnRef idx="1">
@@ -15013,6 +15235,7 @@
           <a:ln>
             <a:noFill/>
           </a:ln>
+          <a:effectLst/>
         </p:spPr>
         <p:style>
           <a:lnRef idx="1">
@@ -15090,6 +15313,7 @@
           <a:ln>
             <a:noFill/>
           </a:ln>
+          <a:effectLst/>
         </p:spPr>
         <p:style>
           <a:lnRef idx="1">
@@ -15133,6 +15357,7 @@
           <a:ln>
             <a:noFill/>
           </a:ln>
+          <a:effectLst/>
         </p:spPr>
         <p:style>
           <a:lnRef idx="1">
@@ -15174,6 +15399,7 @@
           <a:ln>
             <a:noFill/>
           </a:ln>
+          <a:effectLst/>
         </p:spPr>
         <p:style>
           <a:lnRef idx="1">
@@ -15231,6 +15457,7 @@
           <a:ln>
             <a:noFill/>
           </a:ln>
+          <a:effectLst/>
         </p:spPr>
         <p:style>
           <a:lnRef idx="1">
@@ -15288,6 +15515,7 @@
           <a:ln>
             <a:noFill/>
           </a:ln>
+          <a:effectLst/>
         </p:spPr>
         <p:style>
           <a:lnRef idx="1">
@@ -15347,6 +15575,7 @@
           <a:ln>
             <a:noFill/>
           </a:ln>
+          <a:effectLst/>
         </p:spPr>
         <p:style>
           <a:lnRef idx="1">
@@ -15392,6 +15621,7 @@
           <a:ln>
             <a:noFill/>
           </a:ln>
+          <a:effectLst/>
         </p:spPr>
         <p:style>
           <a:lnRef idx="1">
@@ -15435,6 +15665,7 @@
           <a:ln>
             <a:noFill/>
           </a:ln>
+          <a:effectLst/>
         </p:spPr>
         <p:style>
           <a:lnRef idx="1">
@@ -15476,6 +15707,7 @@
           <a:ln>
             <a:noFill/>
           </a:ln>
+          <a:effectLst/>
         </p:spPr>
         <p:style>
           <a:lnRef idx="1">
@@ -15537,6 +15769,7 @@
           <a:ln>
             <a:noFill/>
           </a:ln>
+          <a:effectLst/>
         </p:spPr>
         <p:style>
           <a:lnRef idx="1">
@@ -15571,7 +15804,7 @@
                 </a:solidFill>
                 <a:latin typeface="Noto Sans JP"/>
               </a:rPr>
-              <a:t>Claude Code</a:t>
+              <a:t>アンチグレイビティ × Claude Code</a:t>
             </a:r>
           </a:p>
         </p:txBody>
@@ -15594,6 +15827,7 @@
           <a:ln>
             <a:noFill/>
           </a:ln>
+          <a:effectLst/>
         </p:spPr>
         <p:style>
           <a:lnRef idx="1">
@@ -15674,6 +15908,7 @@
           <a:ln>
             <a:noFill/>
           </a:ln>
+          <a:effectLst/>
         </p:spPr>
         <p:style>
           <a:lnRef idx="1">
@@ -15717,6 +15952,7 @@
           <a:ln>
             <a:noFill/>
           </a:ln>
+          <a:effectLst/>
         </p:spPr>
         <p:style>
           <a:lnRef idx="1">
@@ -15758,6 +15994,7 @@
           <a:ln>
             <a:noFill/>
           </a:ln>
+          <a:effectLst/>
         </p:spPr>
         <p:style>
           <a:lnRef idx="1">
@@ -15819,6 +16056,7 @@
           <a:ln>
             <a:noFill/>
           </a:ln>
+          <a:effectLst/>
         </p:spPr>
         <p:style>
           <a:lnRef idx="1">
@@ -15876,6 +16114,7 @@
           <a:ln>
             <a:noFill/>
           </a:ln>
+          <a:effectLst/>
         </p:spPr>
         <p:style>
           <a:lnRef idx="1">
@@ -15956,6 +16195,7 @@
           <a:ln>
             <a:noFill/>
           </a:ln>
+          <a:effectLst/>
         </p:spPr>
         <p:style>
           <a:lnRef idx="1">
@@ -15999,6 +16239,7 @@
           <a:ln>
             <a:noFill/>
           </a:ln>
+          <a:effectLst/>
         </p:spPr>
         <p:style>
           <a:lnRef idx="1">
@@ -16040,6 +16281,7 @@
           <a:ln>
             <a:noFill/>
           </a:ln>
+          <a:effectLst/>
         </p:spPr>
         <p:style>
           <a:lnRef idx="1">
@@ -16101,6 +16343,7 @@
           <a:ln>
             <a:noFill/>
           </a:ln>
+          <a:effectLst/>
         </p:spPr>
         <p:style>
           <a:lnRef idx="1">
@@ -16158,6 +16401,7 @@
           <a:ln>
             <a:noFill/>
           </a:ln>
+          <a:effectLst/>
         </p:spPr>
         <p:style>
           <a:lnRef idx="1">
@@ -16238,6 +16482,7 @@
           <a:ln>
             <a:noFill/>
           </a:ln>
+          <a:effectLst/>
         </p:spPr>
         <p:style>
           <a:lnRef idx="1">
@@ -16281,6 +16526,7 @@
           <a:ln>
             <a:noFill/>
           </a:ln>
+          <a:effectLst/>
         </p:spPr>
         <p:style>
           <a:lnRef idx="1">
@@ -16322,6 +16568,7 @@
           <a:ln>
             <a:noFill/>
           </a:ln>
+          <a:effectLst/>
         </p:spPr>
         <p:style>
           <a:lnRef idx="1">
@@ -16383,6 +16630,7 @@
           <a:ln>
             <a:noFill/>
           </a:ln>
+          <a:effectLst/>
         </p:spPr>
         <p:style>
           <a:lnRef idx="1">
@@ -16440,6 +16688,7 @@
           <a:ln>
             <a:noFill/>
           </a:ln>
+          <a:effectLst/>
         </p:spPr>
         <p:style>
           <a:lnRef idx="1">
@@ -16520,6 +16769,7 @@
           <a:ln>
             <a:noFill/>
           </a:ln>
+          <a:effectLst/>
         </p:spPr>
         <p:style>
           <a:lnRef idx="1">
@@ -16563,6 +16813,7 @@
           <a:ln>
             <a:noFill/>
           </a:ln>
+          <a:effectLst/>
         </p:spPr>
         <p:style>
           <a:lnRef idx="1">
@@ -16604,6 +16855,7 @@
           <a:ln>
             <a:noFill/>
           </a:ln>
+          <a:effectLst/>
         </p:spPr>
         <p:style>
           <a:lnRef idx="1">
@@ -16665,6 +16917,7 @@
           <a:ln>
             <a:noFill/>
           </a:ln>
+          <a:effectLst/>
         </p:spPr>
         <p:style>
           <a:lnRef idx="1">
@@ -16722,6 +16975,7 @@
           <a:ln>
             <a:noFill/>
           </a:ln>
+          <a:effectLst/>
         </p:spPr>
         <p:style>
           <a:lnRef idx="1">
@@ -16802,6 +17056,7 @@
           <a:ln>
             <a:noFill/>
           </a:ln>
+          <a:effectLst/>
         </p:spPr>
         <p:style>
           <a:lnRef idx="1">
@@ -16845,6 +17100,7 @@
           <a:ln>
             <a:noFill/>
           </a:ln>
+          <a:effectLst/>
         </p:spPr>
         <p:style>
           <a:lnRef idx="1">
@@ -16886,6 +17142,7 @@
           <a:ln>
             <a:noFill/>
           </a:ln>
+          <a:effectLst/>
         </p:spPr>
         <p:style>
           <a:lnRef idx="1">
@@ -16947,6 +17204,7 @@
           <a:ln>
             <a:noFill/>
           </a:ln>
+          <a:effectLst/>
         </p:spPr>
         <p:style>
           <a:lnRef idx="1">
@@ -16981,7 +17239,7 @@
                 </a:solidFill>
                 <a:latin typeface="Noto Sans JP"/>
               </a:rPr>
-              <a:t>Claude Code</a:t>
+              <a:t>Claude Code / AI</a:t>
             </a:r>
           </a:p>
         </p:txBody>
@@ -17004,6 +17262,7 @@
           <a:ln>
             <a:noFill/>
           </a:ln>
+          <a:effectLst/>
         </p:spPr>
         <p:style>
           <a:lnRef idx="1">
@@ -17100,6 +17359,7 @@
           <a:ln>
             <a:noFill/>
           </a:ln>
+          <a:effectLst/>
         </p:spPr>
         <p:style>
           <a:lnRef idx="1">
@@ -17143,6 +17403,7 @@
           <a:ln>
             <a:noFill/>
           </a:ln>
+          <a:effectLst/>
         </p:spPr>
         <p:style>
           <a:lnRef idx="1">
@@ -17184,6 +17445,7 @@
           <a:ln>
             <a:noFill/>
           </a:ln>
+          <a:effectLst/>
         </p:spPr>
         <p:style>
           <a:lnRef idx="1">
@@ -17241,6 +17503,7 @@
           <a:ln>
             <a:noFill/>
           </a:ln>
+          <a:effectLst/>
         </p:spPr>
         <p:style>
           <a:lnRef idx="1">
@@ -17298,6 +17561,7 @@
           <a:ln>
             <a:noFill/>
           </a:ln>
+          <a:effectLst/>
         </p:spPr>
         <p:style>
           <a:lnRef idx="1">
@@ -17357,6 +17621,7 @@
           <a:ln>
             <a:noFill/>
           </a:ln>
+          <a:effectLst/>
         </p:spPr>
         <p:style>
           <a:lnRef idx="1">
@@ -17418,6 +17683,7 @@
           <a:ln>
             <a:noFill/>
           </a:ln>
+          <a:effectLst/>
         </p:spPr>
         <p:style>
           <a:lnRef idx="1">
@@ -17461,6 +17727,7 @@
           <a:ln>
             <a:noFill/>
           </a:ln>
+          <a:effectLst/>
         </p:spPr>
         <p:style>
           <a:lnRef idx="1">
@@ -17502,6 +17769,7 @@
           <a:ln>
             <a:noFill/>
           </a:ln>
+          <a:effectLst/>
         </p:spPr>
         <p:style>
           <a:lnRef idx="1">
@@ -17559,6 +17827,7 @@
           <a:ln>
             <a:noFill/>
           </a:ln>
+          <a:effectLst/>
         </p:spPr>
         <p:style>
           <a:lnRef idx="1">
@@ -17616,6 +17885,7 @@
           <a:ln>
             <a:noFill/>
           </a:ln>
+          <a:effectLst/>
         </p:spPr>
         <p:style>
           <a:lnRef idx="1">
@@ -17675,6 +17945,7 @@
           <a:ln>
             <a:noFill/>
           </a:ln>
+          <a:effectLst/>
         </p:spPr>
         <p:style>
           <a:lnRef idx="1">
@@ -17720,6 +17991,7 @@
           <a:ln>
             <a:noFill/>
           </a:ln>
+          <a:effectLst/>
         </p:spPr>
         <p:style>
           <a:lnRef idx="1">
@@ -17781,6 +18053,7 @@
           <a:ln>
             <a:noFill/>
           </a:ln>
+          <a:effectLst/>
         </p:spPr>
         <p:style>
           <a:lnRef idx="1">
@@ -17842,6 +18115,7 @@
           <a:ln>
             <a:noFill/>
           </a:ln>
+          <a:effectLst/>
         </p:spPr>
         <p:style>
           <a:lnRef idx="1">
@@ -17903,6 +18177,7 @@
           <a:ln>
             <a:noFill/>
           </a:ln>
+          <a:effectLst/>
         </p:spPr>
         <p:style>
           <a:lnRef idx="1">
@@ -17964,6 +18239,7 @@
           <a:ln>
             <a:noFill/>
           </a:ln>
+          <a:effectLst/>
         </p:spPr>
         <p:style>
           <a:lnRef idx="1">
@@ -18025,6 +18301,7 @@
           <a:ln>
             <a:noFill/>
           </a:ln>
+          <a:effectLst/>
         </p:spPr>
         <p:style>
           <a:lnRef idx="1">
@@ -18086,6 +18363,7 @@
           <a:ln>
             <a:noFill/>
           </a:ln>
+          <a:effectLst/>
         </p:spPr>
         <p:style>
           <a:lnRef idx="1">
@@ -18147,6 +18425,7 @@
           <a:ln>
             <a:noFill/>
           </a:ln>
+          <a:effectLst/>
         </p:spPr>
         <p:style>
           <a:lnRef idx="1">
@@ -18208,6 +18487,7 @@
           <a:ln>
             <a:noFill/>
           </a:ln>
+          <a:effectLst/>
         </p:spPr>
         <p:style>
           <a:lnRef idx="1">
@@ -18269,6 +18549,7 @@
           <a:ln>
             <a:noFill/>
           </a:ln>
+          <a:effectLst/>
         </p:spPr>
         <p:style>
           <a:lnRef idx="1">
@@ -18330,6 +18611,7 @@
           <a:ln>
             <a:noFill/>
           </a:ln>
+          <a:effectLst/>
         </p:spPr>
         <p:style>
           <a:lnRef idx="1">
@@ -18391,6 +18673,7 @@
           <a:ln>
             <a:noFill/>
           </a:ln>
+          <a:effectLst/>
         </p:spPr>
         <p:style>
           <a:lnRef idx="1">
@@ -18452,6 +18735,7 @@
           <a:ln>
             <a:noFill/>
           </a:ln>
+          <a:effectLst/>
         </p:spPr>
         <p:style>
           <a:lnRef idx="1">
@@ -18513,6 +18797,7 @@
           <a:ln>
             <a:noFill/>
           </a:ln>
+          <a:effectLst/>
         </p:spPr>
         <p:style>
           <a:lnRef idx="1">
@@ -18574,6 +18859,7 @@
           <a:ln>
             <a:noFill/>
           </a:ln>
+          <a:effectLst/>
         </p:spPr>
         <p:style>
           <a:lnRef idx="1">
@@ -18635,6 +18921,7 @@
           <a:ln>
             <a:noFill/>
           </a:ln>
+          <a:effectLst/>
         </p:spPr>
         <p:style>
           <a:lnRef idx="1">
@@ -18696,6 +18983,7 @@
           <a:ln>
             <a:noFill/>
           </a:ln>
+          <a:effectLst/>
         </p:spPr>
         <p:style>
           <a:lnRef idx="1">
@@ -18757,6 +19045,7 @@
           <a:ln>
             <a:noFill/>
           </a:ln>
+          <a:effectLst/>
         </p:spPr>
         <p:style>
           <a:lnRef idx="1">
@@ -18818,6 +19107,7 @@
           <a:ln>
             <a:noFill/>
           </a:ln>
+          <a:effectLst/>
         </p:spPr>
         <p:style>
           <a:lnRef idx="1">
@@ -18879,6 +19169,7 @@
           <a:ln>
             <a:noFill/>
           </a:ln>
+          <a:effectLst/>
         </p:spPr>
         <p:style>
           <a:lnRef idx="1">
@@ -18940,6 +19231,7 @@
           <a:ln>
             <a:noFill/>
           </a:ln>
+          <a:effectLst/>
         </p:spPr>
         <p:style>
           <a:lnRef idx="1">
@@ -19001,6 +19293,7 @@
           <a:ln>
             <a:noFill/>
           </a:ln>
+          <a:effectLst/>
         </p:spPr>
         <p:style>
           <a:lnRef idx="1">
@@ -19062,6 +19355,7 @@
           <a:ln>
             <a:noFill/>
           </a:ln>
+          <a:effectLst/>
         </p:spPr>
         <p:style>
           <a:lnRef idx="1">
@@ -19123,6 +19417,7 @@
           <a:ln>
             <a:noFill/>
           </a:ln>
+          <a:effectLst/>
         </p:spPr>
         <p:style>
           <a:lnRef idx="1">
@@ -19184,6 +19479,7 @@
           <a:ln>
             <a:noFill/>
           </a:ln>
+          <a:effectLst/>
         </p:spPr>
         <p:style>
           <a:lnRef idx="1">
@@ -19245,6 +19541,7 @@
           <a:ln>
             <a:noFill/>
           </a:ln>
+          <a:effectLst/>
         </p:spPr>
         <p:style>
           <a:lnRef idx="1">
@@ -19306,6 +19603,7 @@
           <a:ln>
             <a:noFill/>
           </a:ln>
+          <a:effectLst/>
         </p:spPr>
         <p:style>
           <a:lnRef idx="1">
@@ -19386,6 +19684,7 @@
           <a:ln>
             <a:noFill/>
           </a:ln>
+          <a:effectLst/>
         </p:spPr>
         <p:style>
           <a:lnRef idx="1">
@@ -19447,6 +19746,7 @@
           <a:ln>
             <a:noFill/>
           </a:ln>
+          <a:effectLst/>
         </p:spPr>
         <p:style>
           <a:lnRef idx="1">
@@ -19508,6 +19808,7 @@
           <a:ln>
             <a:noFill/>
           </a:ln>
+          <a:effectLst/>
         </p:spPr>
         <p:style>
           <a:lnRef idx="1">
@@ -19569,6 +19870,7 @@
           <a:ln>
             <a:noFill/>
           </a:ln>
+          <a:effectLst/>
         </p:spPr>
         <p:style>
           <a:lnRef idx="1">
@@ -19630,6 +19932,7 @@
           <a:ln>
             <a:noFill/>
           </a:ln>
+          <a:effectLst/>
         </p:spPr>
         <p:style>
           <a:lnRef idx="1">
@@ -19691,6 +19994,7 @@
           <a:ln>
             <a:noFill/>
           </a:ln>
+          <a:effectLst/>
         </p:spPr>
         <p:style>
           <a:lnRef idx="1">
@@ -19752,6 +20056,7 @@
           <a:ln>
             <a:noFill/>
           </a:ln>
+          <a:effectLst/>
         </p:spPr>
         <p:style>
           <a:lnRef idx="1">
@@ -19813,6 +20118,7 @@
           <a:ln>
             <a:noFill/>
           </a:ln>
+          <a:effectLst/>
         </p:spPr>
         <p:style>
           <a:lnRef idx="1">
@@ -19874,6 +20180,7 @@
           <a:ln>
             <a:noFill/>
           </a:ln>
+          <a:effectLst/>
         </p:spPr>
         <p:style>
           <a:lnRef idx="1">
@@ -19935,6 +20242,7 @@
           <a:ln>
             <a:noFill/>
           </a:ln>
+          <a:effectLst/>
         </p:spPr>
         <p:style>
           <a:lnRef idx="1">
@@ -19996,6 +20304,7 @@
           <a:ln>
             <a:noFill/>
           </a:ln>
+          <a:effectLst/>
         </p:spPr>
         <p:style>
           <a:lnRef idx="1">
@@ -20057,6 +20366,7 @@
           <a:ln>
             <a:noFill/>
           </a:ln>
+          <a:effectLst/>
         </p:spPr>
         <p:style>
           <a:lnRef idx="1">
@@ -20134,6 +20444,7 @@
           <a:ln>
             <a:noFill/>
           </a:ln>
+          <a:effectLst/>
         </p:spPr>
         <p:style>
           <a:lnRef idx="1">
@@ -20177,6 +20488,7 @@
           <a:ln>
             <a:noFill/>
           </a:ln>
+          <a:effectLst/>
         </p:spPr>
         <p:style>
           <a:lnRef idx="1">
@@ -20218,6 +20530,7 @@
           <a:ln>
             <a:noFill/>
           </a:ln>
+          <a:effectLst/>
         </p:spPr>
         <p:style>
           <a:lnRef idx="1">
@@ -20275,6 +20588,7 @@
           <a:ln>
             <a:noFill/>
           </a:ln>
+          <a:effectLst/>
         </p:spPr>
         <p:style>
           <a:lnRef idx="1">
@@ -20332,6 +20646,7 @@
           <a:ln>
             <a:noFill/>
           </a:ln>
+          <a:effectLst/>
         </p:spPr>
         <p:style>
           <a:lnRef idx="1">
@@ -20391,6 +20706,7 @@
           <a:ln>
             <a:noFill/>
           </a:ln>
+          <a:effectLst/>
         </p:spPr>
         <p:style>
           <a:lnRef idx="1">
@@ -20436,6 +20752,7 @@
           <a:ln>
             <a:noFill/>
           </a:ln>
+          <a:effectLst/>
         </p:spPr>
         <p:style>
           <a:lnRef idx="1">
@@ -20479,6 +20796,7 @@
           <a:ln>
             <a:noFill/>
           </a:ln>
+          <a:effectLst/>
         </p:spPr>
         <p:style>
           <a:lnRef idx="1">
@@ -20522,6 +20840,7 @@
           <a:ln>
             <a:noFill/>
           </a:ln>
+          <a:effectLst/>
         </p:spPr>
         <p:style>
           <a:lnRef idx="1">
@@ -20572,6 +20891,7 @@
           <a:ln>
             <a:noFill/>
           </a:ln>
+          <a:effectLst/>
         </p:spPr>
         <p:style>
           <a:lnRef idx="1">
@@ -20648,6 +20968,7 @@
           <a:ln>
             <a:noFill/>
           </a:ln>
+          <a:effectLst/>
         </p:spPr>
         <p:style>
           <a:lnRef idx="1">
@@ -20766,6 +21087,7 @@
           <a:ln>
             <a:noFill/>
           </a:ln>
+          <a:effectLst/>
         </p:spPr>
         <p:style>
           <a:lnRef idx="1">
@@ -20809,6 +21131,7 @@
           <a:ln>
             <a:noFill/>
           </a:ln>
+          <a:effectLst/>
         </p:spPr>
         <p:style>
           <a:lnRef idx="1">
@@ -20852,6 +21175,7 @@
           <a:ln>
             <a:noFill/>
           </a:ln>
+          <a:effectLst/>
         </p:spPr>
         <p:style>
           <a:lnRef idx="1">
@@ -20902,6 +21226,7 @@
           <a:ln>
             <a:noFill/>
           </a:ln>
+          <a:effectLst/>
         </p:spPr>
         <p:style>
           <a:lnRef idx="1">
@@ -20978,6 +21303,7 @@
           <a:ln>
             <a:noFill/>
           </a:ln>
+          <a:effectLst/>
         </p:spPr>
         <p:style>
           <a:lnRef idx="1">
@@ -21096,6 +21422,7 @@
           <a:ln>
             <a:noFill/>
           </a:ln>
+          <a:effectLst/>
         </p:spPr>
         <p:style>
           <a:lnRef idx="1">
@@ -21139,6 +21466,7 @@
           <a:ln>
             <a:noFill/>
           </a:ln>
+          <a:effectLst/>
         </p:spPr>
         <p:style>
           <a:lnRef idx="1">
@@ -21182,6 +21510,7 @@
           <a:ln>
             <a:noFill/>
           </a:ln>
+          <a:effectLst/>
         </p:spPr>
         <p:style>
           <a:lnRef idx="1">
@@ -21232,6 +21561,7 @@
           <a:ln>
             <a:noFill/>
           </a:ln>
+          <a:effectLst/>
         </p:spPr>
         <p:style>
           <a:lnRef idx="1">
@@ -21308,6 +21638,7 @@
           <a:ln>
             <a:noFill/>
           </a:ln>
+          <a:effectLst/>
         </p:spPr>
         <p:style>
           <a:lnRef idx="1">
@@ -21426,6 +21757,7 @@
           <a:ln>
             <a:noFill/>
           </a:ln>
+          <a:effectLst/>
         </p:spPr>
         <p:style>
           <a:lnRef idx="1">
@@ -21469,6 +21801,7 @@
           <a:ln>
             <a:noFill/>
           </a:ln>
+          <a:effectLst/>
         </p:spPr>
         <p:style>
           <a:lnRef idx="1">
@@ -21512,6 +21845,7 @@
           <a:ln>
             <a:noFill/>
           </a:ln>
+          <a:effectLst/>
         </p:spPr>
         <p:style>
           <a:lnRef idx="1">
@@ -21562,6 +21896,7 @@
           <a:ln>
             <a:noFill/>
           </a:ln>
+          <a:effectLst/>
         </p:spPr>
         <p:style>
           <a:lnRef idx="1">
@@ -21638,6 +21973,7 @@
           <a:ln>
             <a:noFill/>
           </a:ln>
+          <a:effectLst/>
         </p:spPr>
         <p:style>
           <a:lnRef idx="1">
@@ -21737,6 +22073,7 @@
           <a:ln>
             <a:noFill/>
           </a:ln>
+          <a:effectLst/>
         </p:spPr>
         <p:style>
           <a:lnRef idx="1">
@@ -21780,6 +22117,7 @@
           <a:ln>
             <a:noFill/>
           </a:ln>
+          <a:effectLst/>
         </p:spPr>
         <p:style>
           <a:lnRef idx="1">
@@ -21825,6 +22163,7 @@
           <a:ln>
             <a:noFill/>
           </a:ln>
+          <a:effectLst/>
         </p:spPr>
         <p:style>
           <a:lnRef idx="1">
@@ -21882,6 +22221,7 @@
           <a:ln>
             <a:noFill/>
           </a:ln>
+          <a:effectLst/>
         </p:spPr>
         <p:style>
           <a:lnRef idx="1">
@@ -21939,6 +22279,7 @@
           <a:ln>
             <a:noFill/>
           </a:ln>
+          <a:effectLst/>
         </p:spPr>
         <p:style>
           <a:lnRef idx="1">
@@ -21996,6 +22337,7 @@
           <a:ln>
             <a:noFill/>
           </a:ln>
+          <a:effectLst/>
         </p:spPr>
         <p:style>
           <a:lnRef idx="1">
@@ -22073,6 +22415,7 @@
           <a:ln>
             <a:noFill/>
           </a:ln>
+          <a:effectLst/>
         </p:spPr>
         <p:style>
           <a:lnRef idx="1">
@@ -22116,6 +22459,7 @@
           <a:ln>
             <a:noFill/>
           </a:ln>
+          <a:effectLst/>
         </p:spPr>
         <p:style>
           <a:lnRef idx="1">
@@ -22157,6 +22501,7 @@
           <a:ln>
             <a:noFill/>
           </a:ln>
+          <a:effectLst/>
         </p:spPr>
         <p:style>
           <a:lnRef idx="1">
@@ -22214,6 +22559,7 @@
           <a:ln>
             <a:noFill/>
           </a:ln>
+          <a:effectLst/>
         </p:spPr>
         <p:style>
           <a:lnRef idx="1">
@@ -22273,6 +22619,7 @@
           <a:ln>
             <a:noFill/>
           </a:ln>
+          <a:effectLst/>
         </p:spPr>
         <p:style>
           <a:lnRef idx="1">
@@ -22318,6 +22665,7 @@
           <a:ln>
             <a:noFill/>
           </a:ln>
+          <a:effectLst/>
         </p:spPr>
         <p:style>
           <a:lnRef idx="1">
@@ -22361,6 +22709,7 @@
           <a:ln>
             <a:noFill/>
           </a:ln>
+          <a:effectLst/>
         </p:spPr>
         <p:style>
           <a:lnRef idx="1">
@@ -22406,6 +22755,7 @@
           <a:ln>
             <a:noFill/>
           </a:ln>
+          <a:effectLst/>
         </p:spPr>
         <p:style>
           <a:lnRef idx="1">
@@ -22463,6 +22813,7 @@
           <a:ln>
             <a:noFill/>
           </a:ln>
+          <a:effectLst/>
         </p:spPr>
         <p:style>
           <a:lnRef idx="1">
@@ -22520,6 +22871,7 @@
           <a:ln>
             <a:noFill/>
           </a:ln>
+          <a:effectLst/>
         </p:spPr>
         <p:style>
           <a:lnRef idx="1">
@@ -22581,6 +22933,7 @@
           <a:ln>
             <a:noFill/>
           </a:ln>
+          <a:effectLst/>
         </p:spPr>
         <p:style>
           <a:lnRef idx="1">
@@ -22624,6 +22977,7 @@
           <a:ln>
             <a:noFill/>
           </a:ln>
+          <a:effectLst/>
         </p:spPr>
         <p:style>
           <a:lnRef idx="1">
@@ -22669,6 +23023,7 @@
           <a:ln>
             <a:noFill/>
           </a:ln>
+          <a:effectLst/>
         </p:spPr>
         <p:style>
           <a:lnRef idx="1">
@@ -22726,6 +23081,7 @@
           <a:ln>
             <a:noFill/>
           </a:ln>
+          <a:effectLst/>
         </p:spPr>
         <p:style>
           <a:lnRef idx="1">
@@ -22783,6 +23139,7 @@
           <a:ln>
             <a:noFill/>
           </a:ln>
+          <a:effectLst/>
         </p:spPr>
         <p:style>
           <a:lnRef idx="1">
@@ -22844,6 +23201,7 @@
           <a:ln>
             <a:noFill/>
           </a:ln>
+          <a:effectLst/>
         </p:spPr>
         <p:style>
           <a:lnRef idx="1">
@@ -22887,6 +23245,7 @@
           <a:ln>
             <a:noFill/>
           </a:ln>
+          <a:effectLst/>
         </p:spPr>
         <p:style>
           <a:lnRef idx="1">
@@ -22932,6 +23291,7 @@
           <a:ln>
             <a:noFill/>
           </a:ln>
+          <a:effectLst/>
         </p:spPr>
         <p:style>
           <a:lnRef idx="1">
@@ -22989,6 +23349,7 @@
           <a:ln>
             <a:noFill/>
           </a:ln>
+          <a:effectLst/>
         </p:spPr>
         <p:style>
           <a:lnRef idx="1">
@@ -23046,6 +23407,7 @@
           <a:ln>
             <a:noFill/>
           </a:ln>
+          <a:effectLst/>
         </p:spPr>
         <p:style>
           <a:lnRef idx="1">
@@ -23107,6 +23469,7 @@
           <a:ln>
             <a:noFill/>
           </a:ln>
+          <a:effectLst/>
         </p:spPr>
         <p:style>
           <a:lnRef idx="1">
@@ -23150,6 +23513,7 @@
           <a:ln>
             <a:noFill/>
           </a:ln>
+          <a:effectLst/>
         </p:spPr>
         <p:style>
           <a:lnRef idx="1">
@@ -23195,6 +23559,7 @@
           <a:ln>
             <a:noFill/>
           </a:ln>
+          <a:effectLst/>
         </p:spPr>
         <p:style>
           <a:lnRef idx="1">
@@ -23252,6 +23617,7 @@
           <a:ln>
             <a:noFill/>
           </a:ln>
+          <a:effectLst/>
         </p:spPr>
         <p:style>
           <a:lnRef idx="1">
@@ -23309,6 +23675,7 @@
           <a:ln>
             <a:noFill/>
           </a:ln>
+          <a:effectLst/>
         </p:spPr>
         <p:style>
           <a:lnRef idx="1">
@@ -23370,6 +23737,7 @@
           <a:ln>
             <a:noFill/>
           </a:ln>
+          <a:effectLst/>
         </p:spPr>
         <p:style>
           <a:lnRef idx="1">
@@ -23413,6 +23781,7 @@
           <a:ln>
             <a:noFill/>
           </a:ln>
+          <a:effectLst/>
         </p:spPr>
         <p:style>
           <a:lnRef idx="1">
@@ -23458,6 +23827,7 @@
           <a:ln>
             <a:noFill/>
           </a:ln>
+          <a:effectLst/>
         </p:spPr>
         <p:style>
           <a:lnRef idx="1">
@@ -23515,6 +23885,7 @@
           <a:ln>
             <a:noFill/>
           </a:ln>
+          <a:effectLst/>
         </p:spPr>
         <p:style>
           <a:lnRef idx="1">
@@ -23572,6 +23943,7 @@
           <a:ln>
             <a:noFill/>
           </a:ln>
+          <a:effectLst/>
         </p:spPr>
         <p:style>
           <a:lnRef idx="1">
@@ -23649,6 +24021,7 @@
           <a:ln>
             <a:noFill/>
           </a:ln>
+          <a:effectLst/>
         </p:spPr>
         <p:style>
           <a:lnRef idx="1">
@@ -23692,6 +24065,7 @@
           <a:ln>
             <a:noFill/>
           </a:ln>
+          <a:effectLst/>
         </p:spPr>
         <p:style>
           <a:lnRef idx="1">
@@ -23733,6 +24107,7 @@
           <a:ln>
             <a:noFill/>
           </a:ln>
+          <a:effectLst/>
         </p:spPr>
         <p:style>
           <a:lnRef idx="1">
@@ -23790,6 +24165,7 @@
           <a:ln>
             <a:noFill/>
           </a:ln>
+          <a:effectLst/>
         </p:spPr>
         <p:style>
           <a:lnRef idx="1">
@@ -23847,6 +24223,7 @@
           <a:ln>
             <a:noFill/>
           </a:ln>
+          <a:effectLst/>
         </p:spPr>
         <p:style>
           <a:lnRef idx="1">
@@ -23906,6 +24283,7 @@
           <a:ln>
             <a:noFill/>
           </a:ln>
+          <a:effectLst/>
         </p:spPr>
         <p:style>
           <a:lnRef idx="1">
@@ -23951,6 +24329,7 @@
           <a:ln>
             <a:noFill/>
           </a:ln>
+          <a:effectLst/>
         </p:spPr>
         <p:style>
           <a:lnRef idx="1">
@@ -24012,6 +24391,7 @@
           <a:ln>
             <a:noFill/>
           </a:ln>
+          <a:effectLst/>
         </p:spPr>
         <p:style>
           <a:lnRef idx="1">
@@ -24055,6 +24435,7 @@
           <a:ln>
             <a:noFill/>
           </a:ln>
+          <a:effectLst/>
         </p:spPr>
         <p:style>
           <a:lnRef idx="1">
@@ -24100,6 +24481,7 @@
           <a:ln>
             <a:noFill/>
           </a:ln>
+          <a:effectLst/>
         </p:spPr>
         <p:style>
           <a:lnRef idx="1">
@@ -24178,6 +24560,7 @@
           <a:ln>
             <a:noFill/>
           </a:ln>
+          <a:effectLst/>
         </p:spPr>
         <p:style>
           <a:lnRef idx="1">
@@ -24223,6 +24606,7 @@
           <a:ln>
             <a:noFill/>
           </a:ln>
+          <a:effectLst/>
         </p:spPr>
         <p:style>
           <a:lnRef idx="1">
@@ -24284,6 +24668,7 @@
           <a:ln>
             <a:noFill/>
           </a:ln>
+          <a:effectLst/>
         </p:spPr>
         <p:style>
           <a:lnRef idx="1">
@@ -24345,6 +24730,7 @@
           <a:ln>
             <a:noFill/>
           </a:ln>
+          <a:effectLst/>
         </p:spPr>
         <p:style>
           <a:lnRef idx="1">
@@ -24406,6 +24792,7 @@
           <a:ln>
             <a:noFill/>
           </a:ln>
+          <a:effectLst/>
         </p:spPr>
         <p:style>
           <a:lnRef idx="1">
@@ -24463,6 +24850,7 @@
           <a:ln>
             <a:noFill/>
           </a:ln>
+          <a:effectLst/>
         </p:spPr>
         <p:style>
           <a:lnRef idx="1">
@@ -24524,6 +24912,7 @@
           <a:ln>
             <a:noFill/>
           </a:ln>
+          <a:effectLst/>
         </p:spPr>
         <p:style>
           <a:lnRef idx="1">
@@ -24585,6 +24974,7 @@
           <a:ln>
             <a:noFill/>
           </a:ln>
+          <a:effectLst/>
         </p:spPr>
         <p:style>
           <a:lnRef idx="1">
@@ -24628,6 +25018,7 @@
           <a:ln>
             <a:noFill/>
           </a:ln>
+          <a:effectLst/>
         </p:spPr>
         <p:style>
           <a:lnRef idx="1">
@@ -24673,6 +25064,7 @@
           <a:ln>
             <a:noFill/>
           </a:ln>
+          <a:effectLst/>
         </p:spPr>
         <p:style>
           <a:lnRef idx="1">
@@ -24751,6 +25143,7 @@
           <a:ln>
             <a:noFill/>
           </a:ln>
+          <a:effectLst/>
         </p:spPr>
         <p:style>
           <a:lnRef idx="1">
@@ -24796,6 +25189,7 @@
           <a:ln>
             <a:noFill/>
           </a:ln>
+          <a:effectLst/>
         </p:spPr>
         <p:style>
           <a:lnRef idx="1">
@@ -24857,6 +25251,7 @@
           <a:ln>
             <a:noFill/>
           </a:ln>
+          <a:effectLst/>
         </p:spPr>
         <p:style>
           <a:lnRef idx="1">
@@ -24918,6 +25313,7 @@
           <a:ln>
             <a:noFill/>
           </a:ln>
+          <a:effectLst/>
         </p:spPr>
         <p:style>
           <a:lnRef idx="1">
@@ -24979,6 +25375,7 @@
           <a:ln>
             <a:noFill/>
           </a:ln>
+          <a:effectLst/>
         </p:spPr>
         <p:style>
           <a:lnRef idx="1">
@@ -25036,6 +25433,7 @@
           <a:ln>
             <a:noFill/>
           </a:ln>
+          <a:effectLst/>
         </p:spPr>
         <p:style>
           <a:lnRef idx="1">
@@ -25097,6 +25495,7 @@
           <a:ln>
             <a:noFill/>
           </a:ln>
+          <a:effectLst/>
         </p:spPr>
         <p:style>
           <a:lnRef idx="1">
@@ -25158,6 +25557,7 @@
           <a:ln>
             <a:noFill/>
           </a:ln>
+          <a:effectLst/>
         </p:spPr>
         <p:style>
           <a:lnRef idx="1">
@@ -25201,6 +25601,7 @@
           <a:ln>
             <a:noFill/>
           </a:ln>
+          <a:effectLst/>
         </p:spPr>
         <p:style>
           <a:lnRef idx="1">
@@ -25246,6 +25647,7 @@
           <a:ln>
             <a:noFill/>
           </a:ln>
+          <a:effectLst/>
         </p:spPr>
         <p:style>
           <a:lnRef idx="1">
@@ -25324,6 +25726,7 @@
           <a:ln>
             <a:noFill/>
           </a:ln>
+          <a:effectLst/>
         </p:spPr>
         <p:style>
           <a:lnRef idx="1">
@@ -25369,6 +25772,7 @@
           <a:ln>
             <a:noFill/>
           </a:ln>
+          <a:effectLst/>
         </p:spPr>
         <p:style>
           <a:lnRef idx="1">
@@ -25430,6 +25834,7 @@
           <a:ln>
             <a:noFill/>
           </a:ln>
+          <a:effectLst/>
         </p:spPr>
         <p:style>
           <a:lnRef idx="1">
@@ -25491,6 +25896,7 @@
           <a:ln>
             <a:noFill/>
           </a:ln>
+          <a:effectLst/>
         </p:spPr>
         <p:style>
           <a:lnRef idx="1">
@@ -25552,6 +25958,7 @@
           <a:ln>
             <a:noFill/>
           </a:ln>
+          <a:effectLst/>
         </p:spPr>
         <p:style>
           <a:lnRef idx="1">
@@ -25629,6 +26036,7 @@
           <a:ln>
             <a:noFill/>
           </a:ln>
+          <a:effectLst/>
         </p:spPr>
         <p:style>
           <a:lnRef idx="1">
@@ -25672,6 +26080,7 @@
           <a:ln>
             <a:noFill/>
           </a:ln>
+          <a:effectLst/>
         </p:spPr>
         <p:style>
           <a:lnRef idx="1">
@@ -25713,6 +26122,7 @@
           <a:ln>
             <a:noFill/>
           </a:ln>
+          <a:effectLst/>
         </p:spPr>
         <p:style>
           <a:lnRef idx="1">
@@ -25770,6 +26180,7 @@
           <a:ln>
             <a:noFill/>
           </a:ln>
+          <a:effectLst/>
         </p:spPr>
         <p:style>
           <a:lnRef idx="1">
@@ -25827,6 +26238,7 @@
           <a:ln>
             <a:noFill/>
           </a:ln>
+          <a:effectLst/>
         </p:spPr>
         <p:style>
           <a:lnRef idx="1">
@@ -25886,6 +26298,7 @@
           <a:ln>
             <a:noFill/>
           </a:ln>
+          <a:effectLst/>
         </p:spPr>
         <p:style>
           <a:lnRef idx="1">
@@ -25931,6 +26344,7 @@
           <a:ln>
             <a:noFill/>
           </a:ln>
+          <a:effectLst/>
         </p:spPr>
         <p:style>
           <a:lnRef idx="1">
@@ -25988,6 +26402,7 @@
           <a:ln>
             <a:noFill/>
           </a:ln>
+          <a:effectLst/>
         </p:spPr>
         <p:style>
           <a:lnRef idx="1">
@@ -26047,6 +26462,7 @@
           <a:ln>
             <a:noFill/>
           </a:ln>
+          <a:effectLst/>
         </p:spPr>
         <p:style>
           <a:lnRef idx="1">
@@ -26088,6 +26504,7 @@
           <a:ln>
             <a:noFill/>
           </a:ln>
+          <a:effectLst/>
         </p:spPr>
         <p:style>
           <a:lnRef idx="1">
@@ -26145,6 +26562,7 @@
           <a:ln>
             <a:noFill/>
           </a:ln>
+          <a:effectLst/>
         </p:spPr>
         <p:style>
           <a:lnRef idx="1">
@@ -26202,6 +26620,7 @@
           <a:ln>
             <a:noFill/>
           </a:ln>
+          <a:effectLst/>
         </p:spPr>
         <p:style>
           <a:lnRef idx="1">
@@ -26263,6 +26682,7 @@
           <a:ln>
             <a:noFill/>
           </a:ln>
+          <a:effectLst/>
         </p:spPr>
         <p:style>
           <a:lnRef idx="1">
@@ -26304,6 +26724,7 @@
           <a:ln>
             <a:noFill/>
           </a:ln>
+          <a:effectLst/>
         </p:spPr>
         <p:style>
           <a:lnRef idx="1">
@@ -26361,6 +26782,7 @@
           <a:ln>
             <a:noFill/>
           </a:ln>
+          <a:effectLst/>
         </p:spPr>
         <p:style>
           <a:lnRef idx="1">
@@ -26418,6 +26840,7 @@
           <a:ln>
             <a:noFill/>
           </a:ln>
+          <a:effectLst/>
         </p:spPr>
         <p:style>
           <a:lnRef idx="1">
@@ -26452,7 +26875,7 @@
                 </a:solidFill>
                 <a:latin typeface="Noto Sans JP"/>
               </a:rPr>
-              <a:t>Claude Codeの基本操作を習得。簡易LPを1本制作</a:t>
+              <a:t>アンチグレイビティ等の操作を習得。簡易LPを1本制作</a:t>
             </a:r>
           </a:p>
         </p:txBody>
@@ -26479,6 +26902,7 @@
           <a:ln>
             <a:noFill/>
           </a:ln>
+          <a:effectLst/>
         </p:spPr>
         <p:style>
           <a:lnRef idx="1">
@@ -26520,6 +26944,7 @@
           <a:ln>
             <a:noFill/>
           </a:ln>
+          <a:effectLst/>
         </p:spPr>
         <p:style>
           <a:lnRef idx="1">
@@ -26577,6 +27002,7 @@
           <a:ln>
             <a:noFill/>
           </a:ln>
+          <a:effectLst/>
         </p:spPr>
         <p:style>
           <a:lnRef idx="1">
@@ -26634,6 +27060,7 @@
           <a:ln>
             <a:noFill/>
           </a:ln>
+          <a:effectLst/>
         </p:spPr>
         <p:style>
           <a:lnRef idx="1">
@@ -26695,6 +27122,7 @@
           <a:ln>
             <a:noFill/>
           </a:ln>
+          <a:effectLst/>
         </p:spPr>
         <p:style>
           <a:lnRef idx="1">
@@ -26736,6 +27164,7 @@
           <a:ln>
             <a:noFill/>
           </a:ln>
+          <a:effectLst/>
         </p:spPr>
         <p:style>
           <a:lnRef idx="1">
@@ -26793,6 +27222,7 @@
           <a:ln>
             <a:noFill/>
           </a:ln>
+          <a:effectLst/>
         </p:spPr>
         <p:style>
           <a:lnRef idx="1">
@@ -26850,6 +27280,7 @@
           <a:ln>
             <a:noFill/>
           </a:ln>
+          <a:effectLst/>
         </p:spPr>
         <p:style>
           <a:lnRef idx="1">
@@ -26911,6 +27342,7 @@
           <a:ln>
             <a:noFill/>
           </a:ln>
+          <a:effectLst/>
         </p:spPr>
         <p:style>
           <a:lnRef idx="1">
@@ -26968,6 +27400,7 @@
           <a:ln>
             <a:noFill/>
           </a:ln>
+          <a:effectLst/>
         </p:spPr>
         <p:style>
           <a:lnRef idx="1">
@@ -27027,6 +27460,7 @@
           <a:ln>
             <a:noFill/>
           </a:ln>
+          <a:effectLst/>
         </p:spPr>
         <p:style>
           <a:lnRef idx="1">
@@ -27068,6 +27502,7 @@
           <a:ln>
             <a:noFill/>
           </a:ln>
+          <a:effectLst/>
         </p:spPr>
         <p:style>
           <a:lnRef idx="1">
@@ -27125,6 +27560,7 @@
           <a:ln>
             <a:noFill/>
           </a:ln>
+          <a:effectLst/>
         </p:spPr>
         <p:style>
           <a:lnRef idx="1">
@@ -27182,6 +27618,7 @@
           <a:ln>
             <a:noFill/>
           </a:ln>
+          <a:effectLst/>
         </p:spPr>
         <p:style>
           <a:lnRef idx="1">
@@ -27243,6 +27680,7 @@
           <a:ln>
             <a:noFill/>
           </a:ln>
+          <a:effectLst/>
         </p:spPr>
         <p:style>
           <a:lnRef idx="1">
@@ -27284,6 +27722,7 @@
           <a:ln>
             <a:noFill/>
           </a:ln>
+          <a:effectLst/>
         </p:spPr>
         <p:style>
           <a:lnRef idx="1">
@@ -27341,6 +27780,7 @@
           <a:ln>
             <a:noFill/>
           </a:ln>
+          <a:effectLst/>
         </p:spPr>
         <p:style>
           <a:lnRef idx="1">
@@ -27398,6 +27838,7 @@
           <a:ln>
             <a:noFill/>
           </a:ln>
+          <a:effectLst/>
         </p:spPr>
         <p:style>
           <a:lnRef idx="1">
@@ -27459,6 +27900,7 @@
           <a:ln>
             <a:noFill/>
           </a:ln>
+          <a:effectLst/>
         </p:spPr>
         <p:style>
           <a:lnRef idx="1">
@@ -27500,6 +27942,7 @@
           <a:ln>
             <a:noFill/>
           </a:ln>
+          <a:effectLst/>
         </p:spPr>
         <p:style>
           <a:lnRef idx="1">
@@ -27557,6 +28000,7 @@
           <a:ln>
             <a:noFill/>
           </a:ln>
+          <a:effectLst/>
         </p:spPr>
         <p:style>
           <a:lnRef idx="1">
@@ -27614,6 +28058,7 @@
           <a:ln>
             <a:noFill/>
           </a:ln>
+          <a:effectLst/>
         </p:spPr>
         <p:style>
           <a:lnRef idx="1">
@@ -27675,6 +28120,7 @@
           <a:ln>
             <a:noFill/>
           </a:ln>
+          <a:effectLst/>
         </p:spPr>
         <p:style>
           <a:lnRef idx="1">
@@ -27716,6 +28162,7 @@
           <a:ln>
             <a:noFill/>
           </a:ln>
+          <a:effectLst/>
         </p:spPr>
         <p:style>
           <a:lnRef idx="1">
@@ -27773,6 +28220,7 @@
           <a:ln>
             <a:noFill/>
           </a:ln>
+          <a:effectLst/>
         </p:spPr>
         <p:style>
           <a:lnRef idx="1">
@@ -27830,6 +28278,7 @@
           <a:ln>
             <a:noFill/>
           </a:ln>
+          <a:effectLst/>
         </p:spPr>
         <p:style>
           <a:lnRef idx="1">
@@ -27907,6 +28356,7 @@
           <a:ln>
             <a:noFill/>
           </a:ln>
+          <a:effectLst/>
         </p:spPr>
         <p:style>
           <a:lnRef idx="1">
@@ -27950,6 +28400,7 @@
           <a:ln>
             <a:noFill/>
           </a:ln>
+          <a:effectLst/>
         </p:spPr>
         <p:style>
           <a:lnRef idx="1">
@@ -27991,6 +28442,7 @@
           <a:ln>
             <a:noFill/>
           </a:ln>
+          <a:effectLst/>
         </p:spPr>
         <p:style>
           <a:lnRef idx="1">
@@ -28048,6 +28500,7 @@
           <a:ln>
             <a:noFill/>
           </a:ln>
+          <a:effectLst/>
         </p:spPr>
         <p:style>
           <a:lnRef idx="1">
@@ -28105,6 +28558,7 @@
           <a:ln>
             <a:noFill/>
           </a:ln>
+          <a:effectLst/>
         </p:spPr>
         <p:style>
           <a:lnRef idx="1">
@@ -28164,6 +28618,7 @@
           <a:ln>
             <a:noFill/>
           </a:ln>
+          <a:effectLst/>
         </p:spPr>
         <p:style>
           <a:lnRef idx="1">
@@ -28209,6 +28664,7 @@
           <a:ln>
             <a:noFill/>
           </a:ln>
+          <a:effectLst/>
         </p:spPr>
         <p:style>
           <a:lnRef idx="1">
@@ -28252,6 +28708,7 @@
           <a:ln>
             <a:noFill/>
           </a:ln>
+          <a:effectLst/>
         </p:spPr>
         <p:style>
           <a:lnRef idx="1">
@@ -28295,6 +28752,7 @@
           <a:ln>
             <a:noFill/>
           </a:ln>
+          <a:effectLst/>
         </p:spPr>
         <p:style>
           <a:lnRef idx="1">
@@ -28336,6 +28794,7 @@
           <a:ln>
             <a:noFill/>
           </a:ln>
+          <a:effectLst/>
         </p:spPr>
         <p:style>
           <a:lnRef idx="1">
@@ -28397,6 +28856,7 @@
           <a:ln>
             <a:noFill/>
           </a:ln>
+          <a:effectLst/>
         </p:spPr>
         <p:style>
           <a:lnRef idx="1">
@@ -28454,6 +28914,7 @@
           <a:ln>
             <a:noFill/>
           </a:ln>
+          <a:effectLst/>
         </p:spPr>
         <p:style>
           <a:lnRef idx="1">
@@ -28515,6 +28976,7 @@
           <a:ln>
             <a:noFill/>
           </a:ln>
+          <a:effectLst/>
         </p:spPr>
         <p:style>
           <a:lnRef idx="1">
@@ -28572,6 +29034,7 @@
           <a:ln>
             <a:noFill/>
           </a:ln>
+          <a:effectLst/>
         </p:spPr>
         <p:style>
           <a:lnRef idx="1">
@@ -28633,6 +29096,7 @@
           <a:ln>
             <a:noFill/>
           </a:ln>
+          <a:effectLst/>
         </p:spPr>
         <p:style>
           <a:lnRef idx="1">
@@ -28690,6 +29154,7 @@
           <a:ln>
             <a:noFill/>
           </a:ln>
+          <a:effectLst/>
         </p:spPr>
         <p:style>
           <a:lnRef idx="1">
@@ -28751,6 +29216,7 @@
           <a:ln>
             <a:noFill/>
           </a:ln>
+          <a:effectLst/>
         </p:spPr>
         <p:style>
           <a:lnRef idx="1">
@@ -28808,6 +29274,7 @@
           <a:ln>
             <a:noFill/>
           </a:ln>
+          <a:effectLst/>
         </p:spPr>
         <p:style>
           <a:lnRef idx="1">
@@ -28869,6 +29336,7 @@
           <a:ln>
             <a:noFill/>
           </a:ln>
+          <a:effectLst/>
         </p:spPr>
         <p:style>
           <a:lnRef idx="1">
@@ -28926,6 +29394,7 @@
           <a:ln>
             <a:noFill/>
           </a:ln>
+          <a:effectLst/>
         </p:spPr>
         <p:style>
           <a:lnRef idx="1">
@@ -28987,6 +29456,7 @@
           <a:ln>
             <a:noFill/>
           </a:ln>
+          <a:effectLst/>
         </p:spPr>
         <p:style>
           <a:lnRef idx="1">
@@ -29044,6 +29514,7 @@
           <a:ln>
             <a:noFill/>
           </a:ln>
+          <a:effectLst/>
         </p:spPr>
         <p:style>
           <a:lnRef idx="1">
@@ -29105,6 +29576,7 @@
           <a:ln>
             <a:noFill/>
           </a:ln>
+          <a:effectLst/>
         </p:spPr>
         <p:style>
           <a:lnRef idx="1">
@@ -29162,6 +29634,7 @@
           <a:ln>
             <a:noFill/>
           </a:ln>
+          <a:effectLst/>
         </p:spPr>
         <p:style>
           <a:lnRef idx="1">
@@ -29223,6 +29696,7 @@
           <a:ln>
             <a:noFill/>
           </a:ln>
+          <a:effectLst/>
         </p:spPr>
         <p:style>
           <a:lnRef idx="1">
@@ -29280,6 +29754,7 @@
           <a:ln>
             <a:noFill/>
           </a:ln>
+          <a:effectLst/>
         </p:spPr>
         <p:style>
           <a:lnRef idx="1">
@@ -29341,6 +29816,7 @@
           <a:ln>
             <a:noFill/>
           </a:ln>
+          <a:effectLst/>
         </p:spPr>
         <p:style>
           <a:lnRef idx="1">
@@ -29384,6 +29860,7 @@
           <a:ln>
             <a:noFill/>
           </a:ln>
+          <a:effectLst/>
         </p:spPr>
         <p:style>
           <a:lnRef idx="1">
@@ -29427,6 +29904,7 @@
           <a:ln>
             <a:noFill/>
           </a:ln>
+          <a:effectLst/>
         </p:spPr>
         <p:style>
           <a:lnRef idx="1">
@@ -29468,6 +29946,7 @@
           <a:ln>
             <a:noFill/>
           </a:ln>
+          <a:effectLst/>
         </p:spPr>
         <p:style>
           <a:lnRef idx="1">
@@ -29529,6 +30008,7 @@
           <a:ln>
             <a:noFill/>
           </a:ln>
+          <a:effectLst/>
         </p:spPr>
         <p:style>
           <a:lnRef idx="1">
@@ -29626,6 +30106,7 @@
           <a:ln>
             <a:noFill/>
           </a:ln>
+          <a:effectLst/>
         </p:spPr>
         <p:style>
           <a:lnRef idx="1">
@@ -29671,6 +30152,7 @@
           <a:ln>
             <a:noFill/>
           </a:ln>
+          <a:effectLst/>
         </p:spPr>
         <p:style>
           <a:lnRef idx="1">
@@ -29732,6 +30214,7 @@
           <a:ln>
             <a:noFill/>
           </a:ln>
+          <a:effectLst/>
         </p:spPr>
         <p:style>
           <a:lnRef idx="1">
@@ -29793,6 +30276,7 @@
           <a:ln>
             <a:noFill/>
           </a:ln>
+          <a:effectLst/>
         </p:spPr>
         <p:style>
           <a:lnRef idx="1">
@@ -29854,6 +30338,7 @@
           <a:ln>
             <a:noFill/>
           </a:ln>
+          <a:effectLst/>
         </p:spPr>
         <p:style>
           <a:lnRef idx="1">
@@ -29915,6 +30400,7 @@
           <a:ln>
             <a:noFill/>
           </a:ln>
+          <a:effectLst/>
         </p:spPr>
         <p:style>
           <a:lnRef idx="1">
@@ -29993,6 +30479,7 @@
           <a:ln>
             <a:noFill/>
           </a:ln>
+          <a:effectLst/>
         </p:spPr>
         <p:style>
           <a:lnRef idx="1">
@@ -30054,6 +30541,7 @@
           <a:ln>
             <a:noFill/>
           </a:ln>
+          <a:effectLst/>
         </p:spPr>
         <p:style>
           <a:lnRef idx="1">
@@ -30097,6 +30585,7 @@
           <a:ln>
             <a:noFill/>
           </a:ln>
+          <a:effectLst/>
         </p:spPr>
         <p:style>
           <a:lnRef idx="1">
@@ -30138,6 +30627,7 @@
           <a:ln>
             <a:noFill/>
           </a:ln>
+          <a:effectLst/>
         </p:spPr>
         <p:style>
           <a:lnRef idx="1">
@@ -30195,6 +30685,7 @@
           <a:ln>
             <a:noFill/>
           </a:ln>
+          <a:effectLst/>
         </p:spPr>
         <p:style>
           <a:lnRef idx="1">
@@ -30254,6 +30745,7 @@
           <a:ln>
             <a:noFill/>
           </a:ln>
+          <a:effectLst/>
         </p:spPr>
         <p:style>
           <a:lnRef idx="1">
@@ -30299,6 +30791,7 @@
           <a:ln>
             <a:noFill/>
           </a:ln>
+          <a:effectLst/>
         </p:spPr>
         <p:style>
           <a:lnRef idx="1">
@@ -30342,6 +30835,7 @@
           <a:ln>
             <a:noFill/>
           </a:ln>
+          <a:effectLst/>
         </p:spPr>
         <p:style>
           <a:lnRef idx="1">
@@ -30385,6 +30879,7 @@
           <a:ln>
             <a:noFill/>
           </a:ln>
+          <a:effectLst/>
         </p:spPr>
         <p:style>
           <a:lnRef idx="1">
@@ -30437,6 +30932,7 @@
           <a:ln>
             <a:noFill/>
           </a:ln>
+          <a:effectLst/>
         </p:spPr>
         <p:style>
           <a:lnRef idx="1">
@@ -30482,6 +30978,7 @@
           <a:ln>
             <a:noFill/>
           </a:ln>
+          <a:effectLst/>
         </p:spPr>
         <p:style>
           <a:lnRef idx="1">
@@ -30541,6 +31038,7 @@
           <a:ln>
             <a:noFill/>
           </a:ln>
+          <a:effectLst/>
         </p:spPr>
         <p:style>
           <a:lnRef idx="1">
@@ -30582,6 +31080,7 @@
           <a:ln>
             <a:noFill/>
           </a:ln>
+          <a:effectLst/>
         </p:spPr>
         <p:style>
           <a:lnRef idx="1">
@@ -30662,6 +31161,7 @@
           <a:ln>
             <a:noFill/>
           </a:ln>
+          <a:effectLst/>
         </p:spPr>
         <p:style>
           <a:lnRef idx="1">
@@ -30705,6 +31205,7 @@
           <a:ln>
             <a:noFill/>
           </a:ln>
+          <a:effectLst/>
         </p:spPr>
         <p:style>
           <a:lnRef idx="1">
@@ -30748,6 +31249,7 @@
           <a:ln>
             <a:noFill/>
           </a:ln>
+          <a:effectLst/>
         </p:spPr>
         <p:style>
           <a:lnRef idx="1">
@@ -30800,6 +31302,7 @@
           <a:ln>
             <a:noFill/>
           </a:ln>
+          <a:effectLst/>
         </p:spPr>
         <p:style>
           <a:lnRef idx="1">
@@ -30845,6 +31348,7 @@
           <a:ln>
             <a:noFill/>
           </a:ln>
+          <a:effectLst/>
         </p:spPr>
         <p:style>
           <a:lnRef idx="1">
@@ -30904,6 +31408,7 @@
           <a:ln>
             <a:noFill/>
           </a:ln>
+          <a:effectLst/>
         </p:spPr>
         <p:style>
           <a:lnRef idx="1">
@@ -30945,6 +31450,7 @@
           <a:ln>
             <a:noFill/>
           </a:ln>
+          <a:effectLst/>
         </p:spPr>
         <p:style>
           <a:lnRef idx="1">
@@ -31025,6 +31531,7 @@
           <a:ln>
             <a:noFill/>
           </a:ln>
+          <a:effectLst/>
         </p:spPr>
         <p:style>
           <a:lnRef idx="1">
@@ -31068,6 +31575,7 @@
           <a:ln>
             <a:noFill/>
           </a:ln>
+          <a:effectLst/>
         </p:spPr>
         <p:style>
           <a:lnRef idx="1">
@@ -31111,6 +31619,7 @@
           <a:ln>
             <a:noFill/>
           </a:ln>
+          <a:effectLst/>
         </p:spPr>
         <p:style>
           <a:lnRef idx="1">
@@ -31165,6 +31674,7 @@
           <a:ln>
             <a:noFill/>
           </a:ln>
+          <a:effectLst/>
         </p:spPr>
         <p:style>
           <a:lnRef idx="1">
@@ -31224,6 +31734,7 @@
           <a:ln>
             <a:noFill/>
           </a:ln>
+          <a:effectLst/>
         </p:spPr>
         <p:style>
           <a:lnRef idx="1">
@@ -31265,6 +31776,7 @@
           <a:ln>
             <a:noFill/>
           </a:ln>
+          <a:effectLst/>
         </p:spPr>
         <p:style>
           <a:lnRef idx="1">
@@ -31345,6 +31857,7 @@
           <a:ln>
             <a:noFill/>
           </a:ln>
+          <a:effectLst/>
         </p:spPr>
         <p:style>
           <a:lnRef idx="1">
@@ -31422,6 +31935,7 @@
           <a:ln>
             <a:noFill/>
           </a:ln>
+          <a:effectLst/>
         </p:spPr>
         <p:style>
           <a:lnRef idx="1">
@@ -31465,6 +31979,7 @@
           <a:ln>
             <a:noFill/>
           </a:ln>
+          <a:effectLst/>
         </p:spPr>
         <p:style>
           <a:lnRef idx="1">
@@ -31508,6 +32023,7 @@
           <a:ln>
             <a:noFill/>
           </a:ln>
+          <a:effectLst/>
         </p:spPr>
         <p:style>
           <a:lnRef idx="1">
@@ -31549,6 +32065,7 @@
           <a:ln>
             <a:noFill/>
           </a:ln>
+          <a:effectLst/>
         </p:spPr>
         <p:style>
           <a:lnRef idx="1">
@@ -31610,6 +32127,7 @@
           <a:ln>
             <a:noFill/>
           </a:ln>
+          <a:effectLst/>
         </p:spPr>
         <p:style>
           <a:lnRef idx="1">
@@ -31745,6 +32263,7 @@
           <a:ln>
             <a:noFill/>
           </a:ln>
+          <a:effectLst/>
         </p:spPr>
         <p:style>
           <a:lnRef idx="1">
@@ -31786,6 +32305,7 @@
           <a:ln>
             <a:noFill/>
           </a:ln>
+          <a:effectLst/>
         </p:spPr>
         <p:style>
           <a:lnRef idx="1">
@@ -31843,6 +32363,7 @@
           <a:ln>
             <a:noFill/>
           </a:ln>
+          <a:effectLst/>
         </p:spPr>
         <p:style>
           <a:lnRef idx="1">
@@ -31900,6 +32421,7 @@
           <a:ln>
             <a:noFill/>
           </a:ln>
+          <a:effectLst/>
         </p:spPr>
         <p:style>
           <a:lnRef idx="1">
@@ -31961,6 +32483,7 @@
           <a:ln>
             <a:noFill/>
           </a:ln>
+          <a:effectLst/>
         </p:spPr>
         <p:style>
           <a:lnRef idx="1">
@@ -32076,6 +32599,7 @@
           <a:ln>
             <a:noFill/>
           </a:ln>
+          <a:effectLst/>
         </p:spPr>
         <p:style>
           <a:lnRef idx="1">
@@ -32119,6 +32643,7 @@
           <a:ln>
             <a:noFill/>
           </a:ln>
+          <a:effectLst/>
         </p:spPr>
         <p:style>
           <a:lnRef idx="1">
@@ -32160,6 +32685,7 @@
           <a:ln>
             <a:noFill/>
           </a:ln>
+          <a:effectLst/>
         </p:spPr>
         <p:style>
           <a:lnRef idx="1">
@@ -32217,6 +32743,7 @@
           <a:ln>
             <a:noFill/>
           </a:ln>
+          <a:effectLst/>
         </p:spPr>
         <p:style>
           <a:lnRef idx="1">
@@ -32276,6 +32803,7 @@
           <a:ln>
             <a:noFill/>
           </a:ln>
+          <a:effectLst/>
         </p:spPr>
         <p:style>
           <a:lnRef idx="1">
@@ -32337,6 +32865,7 @@
           <a:ln>
             <a:noFill/>
           </a:ln>
+          <a:effectLst/>
         </p:spPr>
         <p:style>
           <a:lnRef idx="1">
@@ -32380,6 +32909,7 @@
           <a:ln>
             <a:noFill/>
           </a:ln>
+          <a:effectLst/>
         </p:spPr>
         <p:style>
           <a:lnRef idx="1">
@@ -32421,6 +32951,7 @@
           <a:ln>
             <a:noFill/>
           </a:ln>
+          <a:effectLst/>
         </p:spPr>
         <p:style>
           <a:lnRef idx="1">
@@ -32478,6 +33009,7 @@
           <a:ln>
             <a:noFill/>
           </a:ln>
+          <a:effectLst/>
         </p:spPr>
         <p:style>
           <a:lnRef idx="1">
@@ -32537,6 +33069,7 @@
           <a:ln>
             <a:noFill/>
           </a:ln>
+          <a:effectLst/>
         </p:spPr>
         <p:style>
           <a:lnRef idx="1">
@@ -32582,6 +33115,7 @@
           <a:ln>
             <a:noFill/>
           </a:ln>
+          <a:effectLst/>
         </p:spPr>
         <p:style>
           <a:lnRef idx="1">
@@ -32627,6 +33161,7 @@
           <a:ln>
             <a:noFill/>
           </a:ln>
+          <a:effectLst/>
         </p:spPr>
         <p:style>
           <a:lnRef idx="1">
@@ -32684,6 +33219,7 @@
           <a:ln>
             <a:noFill/>
           </a:ln>
+          <a:effectLst/>
         </p:spPr>
         <p:style>
           <a:lnRef idx="1">
@@ -32745,6 +33281,7 @@
           <a:ln>
             <a:noFill/>
           </a:ln>
+          <a:effectLst/>
         </p:spPr>
         <p:style>
           <a:lnRef idx="1">
@@ -32802,6 +33339,7 @@
           <a:ln>
             <a:noFill/>
           </a:ln>
+          <a:effectLst/>
         </p:spPr>
         <p:style>
           <a:lnRef idx="1">
@@ -32901,6 +33439,7 @@
           <a:ln>
             <a:noFill/>
           </a:ln>
+          <a:effectLst/>
         </p:spPr>
         <p:style>
           <a:lnRef idx="1">
@@ -32958,6 +33497,7 @@
           <a:ln>
             <a:noFill/>
           </a:ln>
+          <a:effectLst/>
         </p:spPr>
         <p:style>
           <a:lnRef idx="1">
@@ -33019,6 +33559,7 @@
           <a:ln>
             <a:noFill/>
           </a:ln>
+          <a:effectLst/>
         </p:spPr>
         <p:style>
           <a:lnRef idx="1">
@@ -33076,6 +33617,7 @@
           <a:ln>
             <a:noFill/>
           </a:ln>
+          <a:effectLst/>
         </p:spPr>
         <p:style>
           <a:lnRef idx="1">
@@ -33137,6 +33679,7 @@
           <a:ln>
             <a:noFill/>
           </a:ln>
+          <a:effectLst/>
         </p:spPr>
         <p:style>
           <a:lnRef idx="1">
@@ -33194,6 +33737,7 @@
           <a:ln>
             <a:noFill/>
           </a:ln>
+          <a:effectLst/>
         </p:spPr>
         <p:style>
           <a:lnRef idx="1">
@@ -33274,6 +33818,7 @@
           <a:ln>
             <a:noFill/>
           </a:ln>
+          <a:effectLst/>
         </p:spPr>
         <p:style>
           <a:lnRef idx="1">
@@ -33333,6 +33878,7 @@
           <a:ln>
             <a:noFill/>
           </a:ln>
+          <a:effectLst/>
         </p:spPr>
         <p:style>
           <a:lnRef idx="1">
@@ -33378,6 +33924,7 @@
           <a:ln>
             <a:noFill/>
           </a:ln>
+          <a:effectLst/>
         </p:spPr>
         <p:style>
           <a:lnRef idx="1">
@@ -33437,6 +33984,7 @@
           <a:ln>
             <a:noFill/>
           </a:ln>
+          <a:effectLst/>
         </p:spPr>
         <p:style>
           <a:lnRef idx="1">
@@ -33482,6 +34030,7 @@
           <a:ln>
             <a:noFill/>
           </a:ln>
+          <a:effectLst/>
         </p:spPr>
         <p:style>
           <a:lnRef idx="1">
@@ -33525,6 +34074,7 @@
           <a:ln>
             <a:noFill/>
           </a:ln>
+          <a:effectLst/>
         </p:spPr>
         <p:style>
           <a:lnRef idx="1">
@@ -33566,6 +34116,7 @@
           <a:ln>
             <a:noFill/>
           </a:ln>
+          <a:effectLst/>
         </p:spPr>
         <p:style>
           <a:lnRef idx="1">
@@ -33623,6 +34174,7 @@
           <a:ln>
             <a:noFill/>
           </a:ln>
+          <a:effectLst/>
         </p:spPr>
         <p:style>
           <a:lnRef idx="1">
@@ -33684,6 +34236,7 @@
           <a:ln>
             <a:noFill/>
           </a:ln>
+          <a:effectLst/>
         </p:spPr>
         <p:style>
           <a:lnRef idx="1">
@@ -33727,6 +34280,7 @@
           <a:ln>
             <a:noFill/>
           </a:ln>
+          <a:effectLst/>
         </p:spPr>
         <p:style>
           <a:lnRef idx="1">
@@ -33768,6 +34322,7 @@
           <a:ln>
             <a:noFill/>
           </a:ln>
+          <a:effectLst/>
         </p:spPr>
         <p:style>
           <a:lnRef idx="1">
@@ -33825,6 +34380,7 @@
           <a:ln>
             <a:noFill/>
           </a:ln>
+          <a:effectLst/>
         </p:spPr>
         <p:style>
           <a:lnRef idx="1">
@@ -33886,6 +34442,7 @@
           <a:ln>
             <a:noFill/>
           </a:ln>
+          <a:effectLst/>
         </p:spPr>
         <p:style>
           <a:lnRef idx="1">
@@ -33929,6 +34486,7 @@
           <a:ln>
             <a:noFill/>
           </a:ln>
+          <a:effectLst/>
         </p:spPr>
         <p:style>
           <a:lnRef idx="1">
@@ -33970,6 +34528,7 @@
           <a:ln>
             <a:noFill/>
           </a:ln>
+          <a:effectLst/>
         </p:spPr>
         <p:style>
           <a:lnRef idx="1">
@@ -34027,6 +34586,7 @@
           <a:ln>
             <a:noFill/>
           </a:ln>
+          <a:effectLst/>
         </p:spPr>
         <p:style>
           <a:lnRef idx="1">
@@ -34088,6 +34648,7 @@
           <a:ln>
             <a:noFill/>
           </a:ln>
+          <a:effectLst/>
         </p:spPr>
         <p:style>
           <a:lnRef idx="1">
@@ -34131,6 +34692,7 @@
           <a:ln>
             <a:noFill/>
           </a:ln>
+          <a:effectLst/>
         </p:spPr>
         <p:style>
           <a:lnRef idx="1">
@@ -34172,6 +34734,7 @@
           <a:ln>
             <a:noFill/>
           </a:ln>
+          <a:effectLst/>
         </p:spPr>
         <p:style>
           <a:lnRef idx="1">
@@ -34229,6 +34792,7 @@
           <a:ln>
             <a:noFill/>
           </a:ln>
+          <a:effectLst/>
         </p:spPr>
         <p:style>
           <a:lnRef idx="1">
@@ -34306,6 +34870,7 @@
           <a:ln>
             <a:noFill/>
           </a:ln>
+          <a:effectLst/>
         </p:spPr>
         <p:style>
           <a:lnRef idx="1">
@@ -34349,6 +34914,7 @@
           <a:ln>
             <a:noFill/>
           </a:ln>
+          <a:effectLst/>
         </p:spPr>
         <p:style>
           <a:lnRef idx="1">
@@ -34390,6 +34956,7 @@
           <a:ln>
             <a:noFill/>
           </a:ln>
+          <a:effectLst/>
         </p:spPr>
         <p:style>
           <a:lnRef idx="1">
@@ -34447,6 +35014,7 @@
           <a:ln>
             <a:noFill/>
           </a:ln>
+          <a:effectLst/>
         </p:spPr>
         <p:style>
           <a:lnRef idx="1">
@@ -34504,6 +35072,7 @@
           <a:ln>
             <a:noFill/>
           </a:ln>
+          <a:effectLst/>
         </p:spPr>
         <p:style>
           <a:lnRef idx="1">
@@ -34563,6 +35132,7 @@
           <a:ln>
             <a:noFill/>
           </a:ln>
+          <a:effectLst/>
         </p:spPr>
         <p:style>
           <a:lnRef idx="1">
@@ -34608,6 +35178,7 @@
           <a:ln>
             <a:noFill/>
           </a:ln>
+          <a:effectLst/>
         </p:spPr>
         <p:style>
           <a:lnRef idx="1">
@@ -34669,6 +35240,7 @@
           <a:ln>
             <a:noFill/>
           </a:ln>
+          <a:effectLst/>
         </p:spPr>
         <p:style>
           <a:lnRef idx="1">
@@ -34730,6 +35302,7 @@
           <a:ln>
             <a:noFill/>
           </a:ln>
+          <a:effectLst/>
         </p:spPr>
         <p:style>
           <a:lnRef idx="1">
@@ -34791,6 +35364,7 @@
           <a:ln>
             <a:noFill/>
           </a:ln>
+          <a:effectLst/>
         </p:spPr>
         <p:style>
           <a:lnRef idx="1">
@@ -34852,6 +35426,7 @@
           <a:ln>
             <a:noFill/>
           </a:ln>
+          <a:effectLst/>
         </p:spPr>
         <p:style>
           <a:lnRef idx="1">
@@ -34913,6 +35488,7 @@
           <a:ln>
             <a:noFill/>
           </a:ln>
+          <a:effectLst/>
         </p:spPr>
         <p:style>
           <a:lnRef idx="1">
@@ -34974,6 +35550,7 @@
           <a:ln>
             <a:noFill/>
           </a:ln>
+          <a:effectLst/>
         </p:spPr>
         <p:style>
           <a:lnRef idx="1">
@@ -35035,6 +35612,7 @@
           <a:ln>
             <a:noFill/>
           </a:ln>
+          <a:effectLst/>
         </p:spPr>
         <p:style>
           <a:lnRef idx="1">
@@ -35096,6 +35674,7 @@
           <a:ln>
             <a:noFill/>
           </a:ln>
+          <a:effectLst/>
         </p:spPr>
         <p:style>
           <a:lnRef idx="1">
@@ -35139,6 +35718,7 @@
           <a:ln>
             <a:noFill/>
           </a:ln>
+          <a:effectLst/>
         </p:spPr>
         <p:style>
           <a:lnRef idx="1">
@@ -35189,6 +35769,7 @@
           <a:ln>
             <a:noFill/>
           </a:ln>
+          <a:effectLst/>
         </p:spPr>
         <p:style>
           <a:lnRef idx="1">
@@ -35250,6 +35831,7 @@
           <a:ln>
             <a:noFill/>
           </a:ln>
+          <a:effectLst/>
         </p:spPr>
         <p:style>
           <a:lnRef idx="1">
@@ -35328,6 +35910,7 @@
           <a:ln>
             <a:noFill/>
           </a:ln>
+          <a:effectLst/>
         </p:spPr>
         <p:style>
           <a:lnRef idx="1">
@@ -35369,6 +35952,7 @@
           <a:ln>
             <a:noFill/>
           </a:ln>
+          <a:effectLst/>
         </p:spPr>
         <p:style>
           <a:lnRef idx="1">
@@ -35430,6 +36014,7 @@
           <a:ln>
             <a:noFill/>
           </a:ln>
+          <a:effectLst/>
         </p:spPr>
         <p:style>
           <a:lnRef idx="1">
@@ -35527,6 +36112,7 @@
           <a:ln>
             <a:noFill/>
           </a:ln>
+          <a:effectLst/>
         </p:spPr>
         <p:style>
           <a:lnRef idx="1">
@@ -35572,6 +36158,7 @@
           <a:ln>
             <a:noFill/>
           </a:ln>
+          <a:effectLst/>
         </p:spPr>
         <p:style>
           <a:lnRef idx="1">
@@ -35615,6 +36202,7 @@
           <a:ln>
             <a:noFill/>
           </a:ln>
+          <a:effectLst/>
         </p:spPr>
         <p:style>
           <a:lnRef idx="1">
@@ -35665,6 +36253,7 @@
           <a:ln>
             <a:noFill/>
           </a:ln>
+          <a:effectLst/>
         </p:spPr>
         <p:style>
           <a:lnRef idx="1">
@@ -35726,6 +36315,7 @@
           <a:ln>
             <a:noFill/>
           </a:ln>
+          <a:effectLst/>
         </p:spPr>
         <p:style>
           <a:lnRef idx="1">
@@ -35804,6 +36394,7 @@
           <a:ln>
             <a:noFill/>
           </a:ln>
+          <a:effectLst/>
         </p:spPr>
         <p:style>
           <a:lnRef idx="1">
@@ -35845,6 +36436,7 @@
           <a:ln>
             <a:noFill/>
           </a:ln>
+          <a:effectLst/>
         </p:spPr>
         <p:style>
           <a:lnRef idx="1">
@@ -35906,6 +36498,7 @@
           <a:ln>
             <a:noFill/>
           </a:ln>
+          <a:effectLst/>
         </p:spPr>
         <p:style>
           <a:lnRef idx="1">
@@ -36003,6 +36596,7 @@
           <a:ln>
             <a:noFill/>
           </a:ln>
+          <a:effectLst/>
         </p:spPr>
         <p:style>
           <a:lnRef idx="1">
@@ -36048,6 +36642,7 @@
           <a:ln>
             <a:noFill/>
           </a:ln>
+          <a:effectLst/>
         </p:spPr>
         <p:style>
           <a:lnRef idx="1">
@@ -36091,6 +36686,7 @@
           <a:ln>
             <a:noFill/>
           </a:ln>
+          <a:effectLst/>
         </p:spPr>
         <p:style>
           <a:lnRef idx="1">
@@ -36141,6 +36737,7 @@
           <a:ln>
             <a:noFill/>
           </a:ln>
+          <a:effectLst/>
         </p:spPr>
         <p:style>
           <a:lnRef idx="1">
@@ -36202,6 +36799,7 @@
           <a:ln>
             <a:noFill/>
           </a:ln>
+          <a:effectLst/>
         </p:spPr>
         <p:style>
           <a:lnRef idx="1">
@@ -36280,6 +36878,7 @@
           <a:ln>
             <a:noFill/>
           </a:ln>
+          <a:effectLst/>
         </p:spPr>
         <p:style>
           <a:lnRef idx="1">
@@ -36321,6 +36920,7 @@
           <a:ln>
             <a:noFill/>
           </a:ln>
+          <a:effectLst/>
         </p:spPr>
         <p:style>
           <a:lnRef idx="1">
@@ -36382,6 +36982,7 @@
           <a:ln>
             <a:noFill/>
           </a:ln>
+          <a:effectLst/>
         </p:spPr>
         <p:style>
           <a:lnRef idx="1">
@@ -36479,6 +37080,7 @@
           <a:ln>
             <a:noFill/>
           </a:ln>
+          <a:effectLst/>
         </p:spPr>
         <p:style>
           <a:lnRef idx="1">
@@ -36540,6 +37142,7 @@
           <a:ln>
             <a:noFill/>
           </a:ln>
+          <a:effectLst/>
         </p:spPr>
         <p:style>
           <a:lnRef idx="1">
@@ -36583,6 +37186,7 @@
           <a:ln>
             <a:noFill/>
           </a:ln>
+          <a:effectLst/>
         </p:spPr>
         <p:style>
           <a:lnRef idx="1">
@@ -36624,6 +37228,7 @@
           <a:ln>
             <a:noFill/>
           </a:ln>
+          <a:effectLst/>
         </p:spPr>
         <p:style>
           <a:lnRef idx="1">
@@ -36681,6 +37286,7 @@
           <a:ln>
             <a:noFill/>
           </a:ln>
+          <a:effectLst/>
         </p:spPr>
         <p:style>
           <a:lnRef idx="1">
@@ -36738,6 +37344,7 @@
           <a:ln>
             <a:noFill/>
           </a:ln>
+          <a:effectLst/>
         </p:spPr>
         <p:style>
           <a:lnRef idx="1">
@@ -36797,6 +37404,7 @@
           <a:ln>
             <a:noFill/>
           </a:ln>
+          <a:effectLst/>
         </p:spPr>
         <p:style>
           <a:lnRef idx="1">
@@ -36858,6 +37466,7 @@
           <a:ln>
             <a:noFill/>
           </a:ln>
+          <a:effectLst/>
         </p:spPr>
         <p:style>
           <a:lnRef idx="1">
@@ -36901,6 +37510,7 @@
           <a:ln>
             <a:noFill/>
           </a:ln>
+          <a:effectLst/>
         </p:spPr>
         <p:style>
           <a:lnRef idx="1">
@@ -36942,6 +37552,7 @@
           <a:ln>
             <a:noFill/>
           </a:ln>
+          <a:effectLst/>
         </p:spPr>
         <p:style>
           <a:lnRef idx="1">
@@ -36999,6 +37610,7 @@
           <a:ln>
             <a:noFill/>
           </a:ln>
+          <a:effectLst/>
         </p:spPr>
         <p:style>
           <a:lnRef idx="1">
@@ -37056,6 +37668,7 @@
           <a:ln>
             <a:noFill/>
           </a:ln>
+          <a:effectLst/>
         </p:spPr>
         <p:style>
           <a:lnRef idx="1">
@@ -37115,6 +37728,7 @@
           <a:ln>
             <a:noFill/>
           </a:ln>
+          <a:effectLst/>
         </p:spPr>
         <p:style>
           <a:lnRef idx="1">
@@ -37160,6 +37774,7 @@
           <a:ln>
             <a:noFill/>
           </a:ln>
+          <a:effectLst/>
         </p:spPr>
         <p:style>
           <a:lnRef idx="1">
@@ -37203,6 +37818,7 @@
           <a:ln>
             <a:noFill/>
           </a:ln>
+          <a:effectLst/>
         </p:spPr>
         <p:style>
           <a:lnRef idx="1">
@@ -37246,6 +37862,7 @@
           <a:ln>
             <a:noFill/>
           </a:ln>
+          <a:effectLst/>
         </p:spPr>
         <p:style>
           <a:lnRef idx="1">
@@ -37287,6 +37904,7 @@
           <a:ln>
             <a:noFill/>
           </a:ln>
+          <a:effectLst/>
         </p:spPr>
         <p:style>
           <a:lnRef idx="1">
@@ -37348,6 +37966,7 @@
           <a:ln>
             <a:noFill/>
           </a:ln>
+          <a:effectLst/>
         </p:spPr>
         <p:style>
           <a:lnRef idx="1">
@@ -37407,6 +38026,7 @@
           <a:ln>
             <a:noFill/>
           </a:ln>
+          <a:effectLst/>
         </p:spPr>
         <p:style>
           <a:lnRef idx="1">
@@ -37468,6 +38088,7 @@
           <a:ln>
             <a:noFill/>
           </a:ln>
+          <a:effectLst/>
         </p:spPr>
         <p:style>
           <a:lnRef idx="1">
@@ -37527,6 +38148,7 @@
           <a:ln>
             <a:noFill/>
           </a:ln>
+          <a:effectLst/>
         </p:spPr>
         <p:style>
           <a:lnRef idx="1">
@@ -37588,6 +38210,7 @@
           <a:ln>
             <a:noFill/>
           </a:ln>
+          <a:effectLst/>
         </p:spPr>
         <p:style>
           <a:lnRef idx="1">
@@ -37647,6 +38270,7 @@
           <a:ln>
             <a:noFill/>
           </a:ln>
+          <a:effectLst/>
         </p:spPr>
         <p:style>
           <a:lnRef idx="1">
@@ -37708,6 +38332,7 @@
           <a:ln>
             <a:noFill/>
           </a:ln>
+          <a:effectLst/>
         </p:spPr>
         <p:style>
           <a:lnRef idx="1">
@@ -37767,6 +38392,7 @@
           <a:ln>
             <a:noFill/>
           </a:ln>
+          <a:effectLst/>
         </p:spPr>
         <p:style>
           <a:lnRef idx="1">
@@ -37826,6 +38452,7 @@
           <a:ln>
             <a:noFill/>
           </a:ln>
+          <a:effectLst/>
         </p:spPr>
         <p:style>
           <a:lnRef idx="1">
@@ -37867,6 +38494,7 @@
           <a:ln>
             <a:noFill/>
           </a:ln>
+          <a:effectLst/>
         </p:spPr>
         <p:style>
           <a:lnRef idx="1">
@@ -37928,6 +38556,7 @@
           <a:ln>
             <a:noFill/>
           </a:ln>
+          <a:effectLst/>
         </p:spPr>
         <p:style>
           <a:lnRef idx="1">
@@ -37989,6 +38618,7 @@
           <a:ln>
             <a:noFill/>
           </a:ln>
+          <a:effectLst/>
         </p:spPr>
         <p:style>
           <a:lnRef idx="1">
@@ -38050,6 +38680,7 @@
           <a:ln>
             <a:noFill/>
           </a:ln>
+          <a:effectLst/>
         </p:spPr>
         <p:style>
           <a:lnRef idx="1">
@@ -38111,6 +38742,7 @@
           <a:ln>
             <a:noFill/>
           </a:ln>
+          <a:effectLst/>
         </p:spPr>
         <p:style>
           <a:lnRef idx="1">
@@ -38172,6 +38804,7 @@
           <a:ln>
             <a:noFill/>
           </a:ln>
+          <a:effectLst/>
         </p:spPr>
         <p:style>
           <a:lnRef idx="1">
@@ -38233,6 +38866,7 @@
           <a:ln>
             <a:noFill/>
           </a:ln>
+          <a:effectLst/>
         </p:spPr>
         <p:style>
           <a:lnRef idx="1">
@@ -38276,6 +38910,7 @@
           <a:ln>
             <a:noFill/>
           </a:ln>
+          <a:effectLst/>
         </p:spPr>
         <p:style>
           <a:lnRef idx="1">
@@ -38319,6 +38954,7 @@
           <a:ln>
             <a:noFill/>
           </a:ln>
+          <a:effectLst/>
         </p:spPr>
         <p:style>
           <a:lnRef idx="1">
@@ -38360,6 +38996,7 @@
           <a:ln>
             <a:noFill/>
           </a:ln>
+          <a:effectLst/>
         </p:spPr>
         <p:style>
           <a:lnRef idx="1">
@@ -38421,6 +39058,7 @@
           <a:ln>
             <a:noFill/>
           </a:ln>
+          <a:effectLst/>
         </p:spPr>
         <p:style>
           <a:lnRef idx="1">
@@ -38499,6 +39137,7 @@
           <a:ln>
             <a:noFill/>
           </a:ln>
+          <a:effectLst/>
         </p:spPr>
         <p:style>
           <a:lnRef idx="1">
@@ -38544,6 +39183,7 @@
           <a:ln>
             <a:noFill/>
           </a:ln>
+          <a:effectLst/>
         </p:spPr>
         <p:style>
           <a:lnRef idx="1">
@@ -38622,6 +39262,7 @@
           <a:ln>
             <a:noFill/>
           </a:ln>
+          <a:effectLst/>
         </p:spPr>
         <p:style>
           <a:lnRef idx="1">
@@ -38667,6 +39308,7 @@
           <a:ln>
             <a:noFill/>
           </a:ln>
+          <a:effectLst/>
         </p:spPr>
         <p:style>
           <a:lnRef idx="1">
@@ -38802,6 +39444,7 @@
           <a:ln>
             <a:noFill/>
           </a:ln>
+          <a:effectLst/>
         </p:spPr>
         <p:style>
           <a:lnRef idx="1">
@@ -38863,6 +39506,7 @@
           <a:ln>
             <a:noFill/>
           </a:ln>
+          <a:effectLst/>
         </p:spPr>
         <p:style>
           <a:lnRef idx="1">
@@ -38906,6 +39550,7 @@
           <a:ln>
             <a:noFill/>
           </a:ln>
+          <a:effectLst/>
         </p:spPr>
         <p:style>
           <a:lnRef idx="1">
@@ -38947,6 +39592,7 @@
           <a:ln>
             <a:noFill/>
           </a:ln>
+          <a:effectLst/>
         </p:spPr>
         <p:style>
           <a:lnRef idx="1">
@@ -39004,6 +39650,7 @@
           <a:ln>
             <a:noFill/>
           </a:ln>
+          <a:effectLst/>
         </p:spPr>
         <p:style>
           <a:lnRef idx="1">
@@ -39061,6 +39708,7 @@
           <a:ln>
             <a:noFill/>
           </a:ln>
+          <a:effectLst/>
         </p:spPr>
         <p:style>
           <a:lnRef idx="1">
@@ -39120,6 +39768,7 @@
           <a:ln>
             <a:noFill/>
           </a:ln>
+          <a:effectLst/>
         </p:spPr>
         <p:style>
           <a:lnRef idx="1">
@@ -39181,6 +39830,7 @@
           <a:ln>
             <a:noFill/>
           </a:ln>
+          <a:effectLst/>
         </p:spPr>
         <p:style>
           <a:lnRef idx="1">
@@ -39224,6 +39874,7 @@
           <a:ln>
             <a:noFill/>
           </a:ln>
+          <a:effectLst/>
         </p:spPr>
         <p:style>
           <a:lnRef idx="1">
@@ -39265,6 +39916,7 @@
           <a:ln>
             <a:noFill/>
           </a:ln>
+          <a:effectLst/>
         </p:spPr>
         <p:style>
           <a:lnRef idx="1">
@@ -39322,6 +39974,7 @@
           <a:ln>
             <a:noFill/>
           </a:ln>
+          <a:effectLst/>
         </p:spPr>
         <p:style>
           <a:lnRef idx="1">
@@ -39379,6 +40032,7 @@
           <a:ln>
             <a:noFill/>
           </a:ln>
+          <a:effectLst/>
         </p:spPr>
         <p:style>
           <a:lnRef idx="1">
@@ -39438,6 +40092,7 @@
           <a:ln>
             <a:noFill/>
           </a:ln>
+          <a:effectLst/>
         </p:spPr>
         <p:style>
           <a:lnRef idx="1">
@@ -39483,6 +40138,7 @@
           <a:ln>
             <a:noFill/>
           </a:ln>
+          <a:effectLst/>
         </p:spPr>
         <p:style>
           <a:lnRef idx="1">
@@ -39526,6 +40182,7 @@
           <a:ln>
             <a:noFill/>
           </a:ln>
+          <a:effectLst/>
         </p:spPr>
         <p:style>
           <a:lnRef idx="1">
@@ -39571,6 +40228,7 @@
           <a:ln>
             <a:noFill/>
           </a:ln>
+          <a:effectLst/>
         </p:spPr>
         <p:style>
           <a:lnRef idx="1">
@@ -39628,6 +40286,7 @@
           <a:ln>
             <a:noFill/>
           </a:ln>
+          <a:effectLst/>
         </p:spPr>
         <p:style>
           <a:lnRef idx="1">
@@ -39689,6 +40348,7 @@
           <a:ln>
             <a:noFill/>
           </a:ln>
+          <a:effectLst/>
         </p:spPr>
         <p:style>
           <a:lnRef idx="1">
@@ -39746,6 +40406,7 @@
           <a:ln>
             <a:noFill/>
           </a:ln>
+          <a:effectLst/>
         </p:spPr>
         <p:style>
           <a:lnRef idx="1">
@@ -39807,6 +40468,7 @@
           <a:ln>
             <a:noFill/>
           </a:ln>
+          <a:effectLst/>
         </p:spPr>
         <p:style>
           <a:lnRef idx="1">
@@ -39864,6 +40526,7 @@
           <a:ln>
             <a:noFill/>
           </a:ln>
+          <a:effectLst/>
         </p:spPr>
         <p:style>
           <a:lnRef idx="1">
@@ -39925,6 +40588,7 @@
           <a:ln>
             <a:noFill/>
           </a:ln>
+          <a:effectLst/>
         </p:spPr>
         <p:style>
           <a:lnRef idx="1">
@@ -39982,6 +40646,7 @@
           <a:ln>
             <a:noFill/>
           </a:ln>
+          <a:effectLst/>
         </p:spPr>
         <p:style>
           <a:lnRef idx="1">
@@ -40043,6 +40708,7 @@
           <a:ln>
             <a:noFill/>
           </a:ln>
+          <a:effectLst/>
         </p:spPr>
         <p:style>
           <a:lnRef idx="1">
@@ -40100,6 +40766,7 @@
           <a:ln>
             <a:noFill/>
           </a:ln>
+          <a:effectLst/>
         </p:spPr>
         <p:style>
           <a:lnRef idx="1">
@@ -40161,6 +40828,7 @@
           <a:ln>
             <a:noFill/>
           </a:ln>
+          <a:effectLst/>
         </p:spPr>
         <p:style>
           <a:lnRef idx="1">
@@ -40218,6 +40886,7 @@
           <a:ln>
             <a:noFill/>
           </a:ln>
+          <a:effectLst/>
         </p:spPr>
         <p:style>
           <a:lnRef idx="1">
@@ -40279,6 +40948,7 @@
           <a:ln>
             <a:noFill/>
           </a:ln>
+          <a:effectLst/>
         </p:spPr>
         <p:style>
           <a:lnRef idx="1">
@@ -40357,6 +41027,7 @@
           <a:ln>
             <a:noFill/>
           </a:ln>
+          <a:effectLst/>
         </p:spPr>
         <p:style>
           <a:lnRef idx="1">
@@ -40402,6 +41073,7 @@
           <a:ln>
             <a:noFill/>
           </a:ln>
+          <a:effectLst/>
         </p:spPr>
         <p:style>
           <a:lnRef idx="1">
@@ -40445,6 +41117,7 @@
           <a:ln>
             <a:noFill/>
           </a:ln>
+          <a:effectLst/>
         </p:spPr>
         <p:style>
           <a:lnRef idx="1">
@@ -40486,6 +41159,7 @@
           <a:ln>
             <a:noFill/>
           </a:ln>
+          <a:effectLst/>
         </p:spPr>
         <p:style>
           <a:lnRef idx="1">
@@ -40547,6 +41221,7 @@
           <a:ln>
             <a:noFill/>
           </a:ln>
+          <a:effectLst/>
         </p:spPr>
         <p:style>
           <a:lnRef idx="1">
@@ -40590,6 +41265,7 @@
           <a:ln>
             <a:noFill/>
           </a:ln>
+          <a:effectLst/>
         </p:spPr>
         <p:style>
           <a:lnRef idx="1">
@@ -40631,6 +41307,7 @@
           <a:ln>
             <a:noFill/>
           </a:ln>
+          <a:effectLst/>
         </p:spPr>
         <p:style>
           <a:lnRef idx="1">
@@ -40688,6 +41365,7 @@
           <a:ln>
             <a:noFill/>
           </a:ln>
+          <a:effectLst/>
         </p:spPr>
         <p:style>
           <a:lnRef idx="1">
@@ -40768,6 +41446,7 @@
           <a:ln>
             <a:noFill/>
           </a:ln>
+          <a:effectLst/>
         </p:spPr>
         <p:style>
           <a:lnRef idx="1">
@@ -40811,6 +41490,7 @@
           <a:ln>
             <a:noFill/>
           </a:ln>
+          <a:effectLst/>
         </p:spPr>
         <p:style>
           <a:lnRef idx="1">
@@ -40852,6 +41532,7 @@
           <a:ln>
             <a:noFill/>
           </a:ln>
+          <a:effectLst/>
         </p:spPr>
         <p:style>
           <a:lnRef idx="1">
@@ -40909,6 +41590,7 @@
           <a:ln>
             <a:noFill/>
           </a:ln>
+          <a:effectLst/>
         </p:spPr>
         <p:style>
           <a:lnRef idx="1">
@@ -40989,6 +41671,7 @@
           <a:ln>
             <a:noFill/>
           </a:ln>
+          <a:effectLst/>
         </p:spPr>
         <p:style>
           <a:lnRef idx="1">
@@ -41032,6 +41715,7 @@
           <a:ln>
             <a:noFill/>
           </a:ln>
+          <a:effectLst/>
         </p:spPr>
         <p:style>
           <a:lnRef idx="1">
@@ -41073,6 +41757,7 @@
           <a:ln>
             <a:noFill/>
           </a:ln>
+          <a:effectLst/>
         </p:spPr>
         <p:style>
           <a:lnRef idx="1">
@@ -41130,6 +41815,7 @@
           <a:ln>
             <a:noFill/>
           </a:ln>
+          <a:effectLst/>
         </p:spPr>
         <p:style>
           <a:lnRef idx="1">
@@ -41226,6 +41912,7 @@
           <a:ln>
             <a:noFill/>
           </a:ln>
+          <a:effectLst/>
         </p:spPr>
         <p:style>
           <a:lnRef idx="1">
@@ -41269,6 +41956,7 @@
           <a:ln>
             <a:noFill/>
           </a:ln>
+          <a:effectLst/>
         </p:spPr>
         <p:style>
           <a:lnRef idx="1">
@@ -41310,6 +41998,7 @@
           <a:ln>
             <a:noFill/>
           </a:ln>
+          <a:effectLst/>
         </p:spPr>
         <p:style>
           <a:lnRef idx="1">
@@ -41367,6 +42056,7 @@
           <a:ln>
             <a:noFill/>
           </a:ln>
+          <a:effectLst/>
         </p:spPr>
         <p:style>
           <a:lnRef idx="1">
@@ -41424,6 +42114,7 @@
           <a:ln>
             <a:noFill/>
           </a:ln>
+          <a:effectLst/>
         </p:spPr>
         <p:style>
           <a:lnRef idx="1">
@@ -41483,6 +42174,7 @@
           <a:ln>
             <a:noFill/>
           </a:ln>
+          <a:effectLst/>
         </p:spPr>
         <p:style>
           <a:lnRef idx="1">
@@ -41526,6 +42218,7 @@
           <a:ln>
             <a:noFill/>
           </a:ln>
+          <a:effectLst/>
         </p:spPr>
         <p:style>
           <a:lnRef idx="1">
@@ -41567,6 +42260,7 @@
           <a:ln>
             <a:noFill/>
           </a:ln>
+          <a:effectLst/>
         </p:spPr>
         <p:style>
           <a:lnRef idx="1">
@@ -41624,6 +42318,7 @@
           <a:ln>
             <a:noFill/>
           </a:ln>
+          <a:effectLst/>
         </p:spPr>
         <p:style>
           <a:lnRef idx="1">
@@ -41681,6 +42376,7 @@
           <a:ln>
             <a:noFill/>
           </a:ln>
+          <a:effectLst/>
         </p:spPr>
         <p:style>
           <a:lnRef idx="1">
@@ -41742,6 +42438,7 @@
           <a:ln>
             <a:noFill/>
           </a:ln>
+          <a:effectLst/>
         </p:spPr>
         <p:style>
           <a:lnRef idx="1">
@@ -41783,6 +42480,7 @@
           <a:ln>
             <a:noFill/>
           </a:ln>
+          <a:effectLst/>
         </p:spPr>
         <p:style>
           <a:lnRef idx="1">
@@ -41840,6 +42538,7 @@
           <a:ln>
             <a:noFill/>
           </a:ln>
+          <a:effectLst/>
         </p:spPr>
         <p:style>
           <a:lnRef idx="1">
@@ -41897,6 +42596,7 @@
           <a:ln>
             <a:noFill/>
           </a:ln>
+          <a:effectLst/>
         </p:spPr>
         <p:style>
           <a:lnRef idx="1">
@@ -41958,6 +42658,7 @@
           <a:ln>
             <a:noFill/>
           </a:ln>
+          <a:effectLst/>
         </p:spPr>
         <p:style>
           <a:lnRef idx="1">
@@ -41999,6 +42700,7 @@
           <a:ln>
             <a:noFill/>
           </a:ln>
+          <a:effectLst/>
         </p:spPr>
         <p:style>
           <a:lnRef idx="1">
@@ -42033,7 +42735,26 @@
                 </a:solidFill>
                 <a:latin typeface="Noto Sans JP"/>
               </a:rPr>
-              <a:t>Claude Code</a:t>
+              <a:t>アンチグレイビティ</a:t>
+            </a:r>
+          </a:p>
+          <a:p>
+            <a:pPr algn="l">
+              <a:spcBef>
+                <a:spcPts val="100"/>
+              </a:spcBef>
+              <a:spcAft>
+                <a:spcPts val="100"/>
+              </a:spcAft>
+            </a:pPr>
+            <a:r>
+              <a:rPr sz="1300" b="1">
+                <a:solidFill>
+                  <a:srgbClr val="1F2937"/>
+                </a:solidFill>
+                <a:latin typeface="Noto Sans JP"/>
+              </a:rPr>
+              <a:t>× Claude Code</a:t>
             </a:r>
           </a:p>
         </p:txBody>
@@ -42056,6 +42777,7 @@
           <a:ln>
             <a:noFill/>
           </a:ln>
+          <a:effectLst/>
         </p:spPr>
         <p:style>
           <a:lnRef idx="1">
@@ -42113,6 +42835,7 @@
           <a:ln>
             <a:noFill/>
           </a:ln>
+          <a:effectLst/>
         </p:spPr>
         <p:style>
           <a:lnRef idx="1">
@@ -42174,6 +42897,7 @@
           <a:ln>
             <a:noFill/>
           </a:ln>
+          <a:effectLst/>
         </p:spPr>
         <p:style>
           <a:lnRef idx="1">
@@ -42215,6 +42939,7 @@
           <a:ln>
             <a:noFill/>
           </a:ln>
+          <a:effectLst/>
         </p:spPr>
         <p:style>
           <a:lnRef idx="1">
@@ -42272,6 +42997,7 @@
           <a:ln>
             <a:noFill/>
           </a:ln>
+          <a:effectLst/>
         </p:spPr>
         <p:style>
           <a:lnRef idx="1">
@@ -42329,6 +43055,7 @@
           <a:ln>
             <a:noFill/>
           </a:ln>
+          <a:effectLst/>
         </p:spPr>
         <p:style>
           <a:lnRef idx="1">
@@ -42390,6 +43117,7 @@
           <a:ln>
             <a:noFill/>
           </a:ln>
+          <a:effectLst/>
         </p:spPr>
         <p:style>
           <a:lnRef idx="1">
@@ -42431,6 +43159,7 @@
           <a:ln>
             <a:noFill/>
           </a:ln>
+          <a:effectLst/>
         </p:spPr>
         <p:style>
           <a:lnRef idx="1">
@@ -42488,6 +43217,7 @@
           <a:ln>
             <a:noFill/>
           </a:ln>
+          <a:effectLst/>
         </p:spPr>
         <p:style>
           <a:lnRef idx="1">
@@ -42545,6 +43275,7 @@
           <a:ln>
             <a:noFill/>
           </a:ln>
+          <a:effectLst/>
         </p:spPr>
         <p:style>
           <a:lnRef idx="1">
@@ -42606,6 +43337,7 @@
           <a:ln>
             <a:noFill/>
           </a:ln>
+          <a:effectLst/>
         </p:spPr>
         <p:style>
           <a:lnRef idx="1">
@@ -42665,6 +43397,7 @@
           <a:ln>
             <a:noFill/>
           </a:ln>
+          <a:effectLst/>
         </p:spPr>
         <p:style>
           <a:lnRef idx="1">
@@ -42710,6 +43443,7 @@
           <a:ln>
             <a:noFill/>
           </a:ln>
+          <a:effectLst/>
         </p:spPr>
         <p:style>
           <a:lnRef idx="1">
@@ -42769,6 +43503,7 @@
           <a:ln>
             <a:noFill/>
           </a:ln>
+          <a:effectLst/>
         </p:spPr>
         <p:style>
           <a:lnRef idx="1">
@@ -42814,6 +43549,7 @@
           <a:ln>
             <a:noFill/>
           </a:ln>
+          <a:effectLst/>
         </p:spPr>
         <p:style>
           <a:lnRef idx="1">
@@ -42848,7 +43584,7 @@
                 </a:solidFill>
                 <a:latin typeface="Noto Sans JP"/>
               </a:rPr>
-              <a:t>Claude CodeでLPを自作する行動力はある。正しいガイドがあれば加速できるポテンシャル。</a:t>
+              <a:t>アンチグレイビティ×Claude CodeでLPを自作する行動力がある。正しいガイドがあれば加速できるポテンシャル。</a:t>
             </a:r>
           </a:p>
         </p:txBody>
@@ -42873,6 +43609,7 @@
           <a:ln>
             <a:noFill/>
           </a:ln>
+          <a:effectLst/>
         </p:spPr>
         <p:style>
           <a:lnRef idx="1">
@@ -42934,6 +43671,7 @@
           <a:ln>
             <a:noFill/>
           </a:ln>
+          <a:effectLst/>
         </p:spPr>
         <p:style>
           <a:lnRef idx="1">
@@ -42977,6 +43715,7 @@
           <a:ln>
             <a:noFill/>
           </a:ln>
+          <a:effectLst/>
         </p:spPr>
         <p:style>
           <a:lnRef idx="1">
@@ -43018,6 +43757,7 @@
           <a:ln>
             <a:noFill/>
           </a:ln>
+          <a:effectLst/>
         </p:spPr>
         <p:style>
           <a:lnRef idx="1">
@@ -43075,6 +43815,7 @@
           <a:ln>
             <a:noFill/>
           </a:ln>
+          <a:effectLst/>
         </p:spPr>
         <p:style>
           <a:lnRef idx="1">
@@ -43132,6 +43873,7 @@
           <a:ln>
             <a:noFill/>
           </a:ln>
+          <a:effectLst/>
         </p:spPr>
         <p:style>
           <a:lnRef idx="1">
@@ -43191,6 +43933,7 @@
           <a:ln>
             <a:noFill/>
           </a:ln>
+          <a:effectLst/>
         </p:spPr>
         <p:style>
           <a:lnRef idx="1">
@@ -43236,6 +43979,7 @@
           <a:ln>
             <a:noFill/>
           </a:ln>
+          <a:effectLst/>
         </p:spPr>
         <p:style>
           <a:lnRef idx="1">
@@ -43279,6 +44023,7 @@
           <a:ln>
             <a:noFill/>
           </a:ln>
+          <a:effectLst/>
         </p:spPr>
         <p:style>
           <a:lnRef idx="1">
@@ -43324,6 +44069,7 @@
           <a:ln>
             <a:noFill/>
           </a:ln>
+          <a:effectLst/>
         </p:spPr>
         <p:style>
           <a:lnRef idx="1">
@@ -43381,6 +44127,7 @@
           <a:ln>
             <a:noFill/>
           </a:ln>
+          <a:effectLst/>
         </p:spPr>
         <p:style>
           <a:lnRef idx="1">
@@ -43442,6 +44189,7 @@
           <a:ln>
             <a:noFill/>
           </a:ln>
+          <a:effectLst/>
         </p:spPr>
         <p:style>
           <a:lnRef idx="1">
@@ -43485,6 +44233,7 @@
           <a:ln>
             <a:noFill/>
           </a:ln>
+          <a:effectLst/>
         </p:spPr>
         <p:style>
           <a:lnRef idx="1">
@@ -43530,6 +44279,7 @@
           <a:ln>
             <a:noFill/>
           </a:ln>
+          <a:effectLst/>
         </p:spPr>
         <p:style>
           <a:lnRef idx="1">
@@ -43587,6 +44337,7 @@
           <a:ln>
             <a:noFill/>
           </a:ln>
+          <a:effectLst/>
         </p:spPr>
         <p:style>
           <a:lnRef idx="1">
@@ -43648,6 +44399,7 @@
           <a:ln>
             <a:noFill/>
           </a:ln>
+          <a:effectLst/>
         </p:spPr>
         <p:style>
           <a:lnRef idx="1">
@@ -43691,6 +44443,7 @@
           <a:ln>
             <a:noFill/>
           </a:ln>
+          <a:effectLst/>
         </p:spPr>
         <p:style>
           <a:lnRef idx="1">
@@ -43736,6 +44489,7 @@
           <a:ln>
             <a:noFill/>
           </a:ln>
+          <a:effectLst/>
         </p:spPr>
         <p:style>
           <a:lnRef idx="1">
@@ -43793,6 +44547,7 @@
           <a:ln>
             <a:noFill/>
           </a:ln>
+          <a:effectLst/>
         </p:spPr>
         <p:style>
           <a:lnRef idx="1">
@@ -43854,6 +44609,7 @@
           <a:ln>
             <a:noFill/>
           </a:ln>
+          <a:effectLst/>
         </p:spPr>
         <p:style>
           <a:lnRef idx="1">
@@ -43897,6 +44653,7 @@
           <a:ln>
             <a:noFill/>
           </a:ln>
+          <a:effectLst/>
         </p:spPr>
         <p:style>
           <a:lnRef idx="1">
@@ -43942,6 +44699,7 @@
           <a:ln>
             <a:noFill/>
           </a:ln>
+          <a:effectLst/>
         </p:spPr>
         <p:style>
           <a:lnRef idx="1">
@@ -43999,6 +44757,7 @@
           <a:ln>
             <a:noFill/>
           </a:ln>
+          <a:effectLst/>
         </p:spPr>
         <p:style>
           <a:lnRef idx="1">
@@ -44060,6 +44819,7 @@
           <a:ln>
             <a:noFill/>
           </a:ln>
+          <a:effectLst/>
         </p:spPr>
         <p:style>
           <a:lnRef idx="1">
@@ -44119,6 +44879,7 @@
           <a:ln>
             <a:noFill/>
           </a:ln>
+          <a:effectLst/>
         </p:spPr>
         <p:style>
           <a:lnRef idx="1">
@@ -44164,6 +44925,7 @@
           <a:ln>
             <a:noFill/>
           </a:ln>
+          <a:effectLst/>
         </p:spPr>
         <p:style>
           <a:lnRef idx="1">
@@ -44223,6 +44985,7 @@
           <a:ln>
             <a:noFill/>
           </a:ln>
+          <a:effectLst/>
         </p:spPr>
         <p:style>
           <a:lnRef idx="1">
@@ -44284,6 +45047,7 @@
           <a:ln>
             <a:noFill/>
           </a:ln>
+          <a:effectLst/>
         </p:spPr>
         <p:style>
           <a:lnRef idx="1">
@@ -44327,6 +45091,7 @@
           <a:ln>
             <a:noFill/>
           </a:ln>
+          <a:effectLst/>
         </p:spPr>
         <p:style>
           <a:lnRef idx="1">
@@ -44368,6 +45133,7 @@
           <a:ln>
             <a:noFill/>
           </a:ln>
+          <a:effectLst/>
         </p:spPr>
         <p:style>
           <a:lnRef idx="1">
@@ -44425,6 +45191,7 @@
           <a:ln>
             <a:noFill/>
           </a:ln>
+          <a:effectLst/>
         </p:spPr>
         <p:style>
           <a:lnRef idx="1">
@@ -44482,6 +45249,7 @@
           <a:ln>
             <a:noFill/>
           </a:ln>
+          <a:effectLst/>
         </p:spPr>
         <p:style>
           <a:lnRef idx="1">
@@ -44541,6 +45309,7 @@
           <a:ln>
             <a:noFill/>
           </a:ln>
+          <a:effectLst/>
         </p:spPr>
         <p:style>
           <a:lnRef idx="1">

--- a/output/proposal_TSUBOMIYA_20260415.pptx
+++ b/output/proposal_TSUBOMIYA_20260415.pptx
@@ -5853,7 +5853,7 @@
                 </a:solidFill>
                 <a:latin typeface="Noto Sans JP"/>
               </a:rPr>
-              <a:t>アンチグレイビティ×Claude CodeでLP制作は80%止まり</a:t>
+              <a:t>Antigravity×Claude CodeでLP制作は80%止まり</a:t>
             </a:r>
           </a:p>
         </p:txBody>
@@ -13264,7 +13264,7 @@
                 </a:solidFill>
                 <a:latin typeface="Noto Sans JP"/>
               </a:rPr>
-              <a:t>アンチグレイビティ等で自作、数時間で公開</a:t>
+              <a:t>Antigravity等で自作、数時間で公開</a:t>
             </a:r>
           </a:p>
         </p:txBody>
@@ -15804,7 +15804,7 @@
                 </a:solidFill>
                 <a:latin typeface="Noto Sans JP"/>
               </a:rPr>
-              <a:t>アンチグレイビティ × Claude Code</a:t>
+              <a:t>Antigravity × Claude Code</a:t>
             </a:r>
           </a:p>
         </p:txBody>
@@ -26875,7 +26875,7 @@
                 </a:solidFill>
                 <a:latin typeface="Noto Sans JP"/>
               </a:rPr>
-              <a:t>アンチグレイビティ等の操作を習得。簡易LPを1本制作</a:t>
+              <a:t>Antigravity等の操作を習得。簡易LPを1本制作</a:t>
             </a:r>
           </a:p>
         </p:txBody>
@@ -42735,7 +42735,7 @@
                 </a:solidFill>
                 <a:latin typeface="Noto Sans JP"/>
               </a:rPr>
-              <a:t>アンチグレイビティ</a:t>
+              <a:t>Antigravity</a:t>
             </a:r>
           </a:p>
           <a:p>
@@ -43584,7 +43584,7 @@
                 </a:solidFill>
                 <a:latin typeface="Noto Sans JP"/>
               </a:rPr>
-              <a:t>アンチグレイビティ×Claude CodeでLPを自作する行動力がある。正しいガイドがあれば加速できるポテンシャル。</a:t>
+              <a:t>Antigravity×Claude CodeでLPを自作する行動力がある。正しいガイドがあれば加速できるポテンシャル。</a:t>
             </a:r>
           </a:p>
         </p:txBody>
